--- a/slides/pptx/week14.pptx
+++ b/slides/pptx/week14.pptx
@@ -2014,7 +2014,7 @@
     <p:bg>
       <p:bgPr>
         <a:solidFill>
-          <a:srgbClr val="0E1726"/>
+          <a:srgbClr val="FFFFFF"/>
         </a:solidFill>
       </p:bgPr>
     </p:bg>
@@ -2032,38 +2032,9 @@
           <a:chExt cx="0" cy="0"/>
         </a:xfrm>
       </p:grpSpPr>
-      <p:sp>
-        <p:nvSpPr>
-          <p:cNvPr id="2" name="Shape 0"/>
-          <p:cNvSpPr/>
-          <p:nvPr/>
-        </p:nvSpPr>
-        <p:spPr>
-          <a:xfrm>
-            <a:off x="603504" y="411480"/>
-            <a:ext cx="1874520" cy="932688"/>
-          </a:xfrm>
-          <a:prstGeom prst="roundRect">
-            <a:avLst>
-              <a:gd name="adj" fmla="val 7843"/>
-            </a:avLst>
-          </a:prstGeom>
-          <a:solidFill>
-            <a:srgbClr val="FFFFFF"/>
-          </a:solidFill>
-          <a:ln/>
-          <a:effectLst>
-            <a:outerShdw sx="100000" sy="100000" kx="0" ky="0" algn="bl" rotWithShape="0" blurRad="101600" dist="38100" dir="5400000">
-              <a:srgbClr val="000000">
-                <a:alpha val="35000"/>
-              </a:srgbClr>
-            </a:outerShdw>
-          </a:effectLst>
-        </p:spPr>
-      </p:sp>
       <p:pic>
         <p:nvPicPr>
-          <p:cNvPr id="3" name="Image 0" descr="/Users/pop7/Library/CloudStorage/OneDrive-MonsterConnectCo.,Ltd/Lecture/KOSEN69 - software-security/slides/pptx/assets/logo-small.png">    </p:cNvPr>
+          <p:cNvPr id="2" name="Image 0" descr="/Users/pop7/Library/CloudStorage/OneDrive-MonsterConnectCo.,Ltd/Lecture/KOSEN69 - software-security/slides/pptx/assets/logo-small.png">    </p:cNvPr>
           <p:cNvPicPr>
             <a:picLocks noChangeAspect="1"/>
           </p:cNvPicPr>
@@ -2077,8 +2048,8 @@
         </p:blipFill>
         <p:spPr>
           <a:xfrm>
-            <a:off x="758952" y="566928"/>
-            <a:ext cx="1563624" cy="621792"/>
+            <a:off x="640080" y="502920"/>
+            <a:ext cx="1691640" cy="676656"/>
           </a:xfrm>
           <a:prstGeom prst="rect">
             <a:avLst/>
@@ -2087,7 +2058,7 @@
       </p:pic>
       <p:sp>
         <p:nvSpPr>
-          <p:cNvPr id="4" name="Text 1"/>
+          <p:cNvPr id="3" name="Text 0"/>
           <p:cNvSpPr/>
           <p:nvPr/>
         </p:nvSpPr>
@@ -2126,7 +2097,7 @@
       </p:sp>
       <p:sp>
         <p:nvSpPr>
-          <p:cNvPr id="5" name="Text 2"/>
+          <p:cNvPr id="4" name="Text 1"/>
           <p:cNvSpPr/>
           <p:nvPr/>
         </p:nvSpPr>
@@ -2154,7 +2125,7 @@
             <a:r>
               <a:rPr lang="en-US" sz="4000" b="1" dirty="0">
                 <a:solidFill>
-                  <a:srgbClr val="E6EDF3"/>
+                  <a:srgbClr val="1F2937"/>
                 </a:solidFill>
                 <a:latin typeface="Arial" pitchFamily="34" charset="0"/>
                 <a:ea typeface="Arial" pitchFamily="34" charset="-122"/>
@@ -2168,7 +2139,7 @@
       </p:sp>
       <p:sp>
         <p:nvSpPr>
-          <p:cNvPr id="6" name="Text 3"/>
+          <p:cNvPr id="5" name="Text 2"/>
           <p:cNvSpPr/>
           <p:nvPr/>
         </p:nvSpPr>
@@ -2193,7 +2164,7 @@
             <a:r>
               <a:rPr lang="en-US" sz="1400" dirty="0">
                 <a:solidFill>
-                  <a:srgbClr val="94A3B8"/>
+                  <a:srgbClr val="64748B"/>
                 </a:solidFill>
                 <a:latin typeface="Calibri" pitchFamily="34" charset="0"/>
                 <a:ea typeface="Calibri" pitchFamily="34" charset="-122"/>
@@ -2219,7 +2190,7 @@
     <p:bg>
       <p:bgPr>
         <a:solidFill>
-          <a:srgbClr val="0E1726"/>
+          <a:srgbClr val="FFFFFF"/>
         </a:solidFill>
       </p:bgPr>
     </p:bg>
@@ -2256,9 +2227,9 @@
           </a:solidFill>
           <a:ln/>
           <a:effectLst>
-            <a:outerShdw sx="100000" sy="100000" kx="0" ky="0" algn="bl" rotWithShape="0" blurRad="101600" dist="38100" dir="5400000">
+            <a:outerShdw sx="100000" sy="100000" kx="0" ky="0" algn="bl" rotWithShape="0" blurRad="76200" dist="25400" dir="5400000">
               <a:srgbClr val="000000">
-                <a:alpha val="35000"/>
+                <a:alpha val="12000"/>
               </a:srgbClr>
             </a:outerShdw>
           </a:effectLst>
@@ -2315,7 +2286,7 @@
             <a:r>
               <a:rPr lang="en-US" sz="2600" b="1" dirty="0">
                 <a:solidFill>
-                  <a:srgbClr val="E6EDF3"/>
+                  <a:srgbClr val="1F2937"/>
                 </a:solidFill>
                 <a:latin typeface="Arial" pitchFamily="34" charset="0"/>
                 <a:ea typeface="Arial" pitchFamily="34" charset="-122"/>
@@ -2344,13 +2315,13 @@
             </a:avLst>
           </a:prstGeom>
           <a:solidFill>
-            <a:srgbClr val="18243A"/>
+            <a:srgbClr val="F1F5F9"/>
           </a:solidFill>
           <a:ln/>
           <a:effectLst>
-            <a:outerShdw sx="100000" sy="100000" kx="0" ky="0" algn="bl" rotWithShape="0" blurRad="101600" dist="38100" dir="5400000">
+            <a:outerShdw sx="100000" sy="100000" kx="0" ky="0" algn="bl" rotWithShape="0" blurRad="76200" dist="25400" dir="5400000">
               <a:srgbClr val="000000">
-                <a:alpha val="35000"/>
+                <a:alpha val="12000"/>
               </a:srgbClr>
             </a:outerShdw>
           </a:effectLst>
@@ -2387,7 +2358,7 @@
             <a:r>
               <a:rPr lang="en-US" sz="1400" dirty="0">
                 <a:solidFill>
-                  <a:srgbClr val="E6EDF3"/>
+                  <a:srgbClr val="1F2937"/>
                 </a:solidFill>
                 <a:latin typeface="Calibri" pitchFamily="34" charset="0"/>
                 <a:ea typeface="Calibri" pitchFamily="34" charset="-122"/>
@@ -2408,7 +2379,7 @@
             <a:r>
               <a:rPr lang="en-US" sz="1400" dirty="0">
                 <a:solidFill>
-                  <a:srgbClr val="E6EDF3"/>
+                  <a:srgbClr val="1F2937"/>
                 </a:solidFill>
                 <a:latin typeface="Calibri" pitchFamily="34" charset="0"/>
                 <a:ea typeface="Calibri" pitchFamily="34" charset="-122"/>
@@ -2429,7 +2400,7 @@
             <a:r>
               <a:rPr lang="en-US" sz="1400" dirty="0">
                 <a:solidFill>
-                  <a:srgbClr val="E6EDF3"/>
+                  <a:srgbClr val="1F2937"/>
                 </a:solidFill>
                 <a:latin typeface="Calibri" pitchFamily="34" charset="0"/>
                 <a:ea typeface="Calibri" pitchFamily="34" charset="-122"/>
@@ -2450,7 +2421,7 @@
             <a:r>
               <a:rPr lang="en-US" sz="1400" dirty="0">
                 <a:solidFill>
-                  <a:srgbClr val="E6EDF3"/>
+                  <a:srgbClr val="1F2937"/>
                 </a:solidFill>
                 <a:latin typeface="Calibri" pitchFamily="34" charset="0"/>
                 <a:ea typeface="Calibri" pitchFamily="34" charset="-122"/>
@@ -2489,7 +2460,7 @@
             <a:r>
               <a:rPr lang="en-US" sz="900" dirty="0">
                 <a:solidFill>
-                  <a:srgbClr val="94A3B8"/>
+                  <a:srgbClr val="64748B"/>
                 </a:solidFill>
                 <a:latin typeface="Calibri" pitchFamily="34" charset="0"/>
                 <a:ea typeface="Calibri" pitchFamily="34" charset="-122"/>
@@ -2501,38 +2472,9 @@
           </a:p>
         </p:txBody>
       </p:sp>
-      <p:sp>
-        <p:nvSpPr>
-          <p:cNvPr id="8" name="Shape 5"/>
-          <p:cNvSpPr/>
-          <p:nvPr/>
-        </p:nvSpPr>
-        <p:spPr>
-          <a:xfrm>
-            <a:off x="7772400" y="4590288"/>
-            <a:ext cx="969264" cy="475488"/>
-          </a:xfrm>
-          <a:prstGeom prst="roundRect">
-            <a:avLst>
-              <a:gd name="adj" fmla="val 11538"/>
-            </a:avLst>
-          </a:prstGeom>
-          <a:solidFill>
-            <a:srgbClr val="FFFFFF"/>
-          </a:solidFill>
-          <a:ln/>
-          <a:effectLst>
-            <a:outerShdw sx="100000" sy="100000" kx="0" ky="0" algn="bl" rotWithShape="0" blurRad="101600" dist="38100" dir="5400000">
-              <a:srgbClr val="000000">
-                <a:alpha val="35000"/>
-              </a:srgbClr>
-            </a:outerShdw>
-          </a:effectLst>
-        </p:spPr>
-      </p:sp>
       <p:pic>
         <p:nvPicPr>
-          <p:cNvPr id="9" name="Image 1" descr="/Users/pop7/Library/CloudStorage/OneDrive-MonsterConnectCo.,Ltd/Lecture/KOSEN69 - software-security/slides/pptx/assets/logo-small.png">    </p:cNvPr>
+          <p:cNvPr id="8" name="Image 1" descr="/Users/pop7/Library/CloudStorage/OneDrive-MonsterConnectCo.,Ltd/Lecture/KOSEN69 - software-security/slides/pptx/assets/logo-small.png">    </p:cNvPr>
           <p:cNvPicPr>
             <a:picLocks noChangeAspect="1"/>
           </p:cNvPicPr>
@@ -2546,7 +2488,7 @@
         </p:blipFill>
         <p:spPr>
           <a:xfrm>
-            <a:off x="7872984" y="4681728"/>
+            <a:off x="7882128" y="4700016"/>
             <a:ext cx="768096" cy="356616"/>
           </a:xfrm>
           <a:prstGeom prst="rect">
@@ -2568,7 +2510,7 @@
     <p:bg>
       <p:bgPr>
         <a:solidFill>
-          <a:srgbClr val="0E1726"/>
+          <a:srgbClr val="FFFFFF"/>
         </a:solidFill>
       </p:bgPr>
     </p:bg>
@@ -2605,9 +2547,9 @@
           </a:solidFill>
           <a:ln/>
           <a:effectLst>
-            <a:outerShdw sx="100000" sy="100000" kx="0" ky="0" algn="bl" rotWithShape="0" blurRad="101600" dist="38100" dir="5400000">
+            <a:outerShdw sx="100000" sy="100000" kx="0" ky="0" algn="bl" rotWithShape="0" blurRad="76200" dist="25400" dir="5400000">
               <a:srgbClr val="000000">
-                <a:alpha val="35000"/>
+                <a:alpha val="12000"/>
               </a:srgbClr>
             </a:outerShdw>
           </a:effectLst>
@@ -2664,7 +2606,7 @@
             <a:r>
               <a:rPr lang="en-US" sz="2600" b="1" dirty="0">
                 <a:solidFill>
-                  <a:srgbClr val="E6EDF3"/>
+                  <a:srgbClr val="1F2937"/>
                 </a:solidFill>
                 <a:latin typeface="Arial" pitchFamily="34" charset="0"/>
                 <a:ea typeface="Arial" pitchFamily="34" charset="-122"/>
@@ -2762,7 +2704,7 @@
             <a:r>
               <a:rPr lang="en-US" sz="1350" dirty="0">
                 <a:solidFill>
-                  <a:srgbClr val="E6EDF3"/>
+                  <a:srgbClr val="1F2937"/>
                 </a:solidFill>
                 <a:latin typeface="Calibri" pitchFamily="34" charset="0"/>
                 <a:ea typeface="Calibri" pitchFamily="34" charset="-122"/>
@@ -2860,7 +2802,7 @@
             <a:r>
               <a:rPr lang="en-US" sz="1350" dirty="0">
                 <a:solidFill>
-                  <a:srgbClr val="E6EDF3"/>
+                  <a:srgbClr val="1F2937"/>
                 </a:solidFill>
                 <a:latin typeface="Calibri" pitchFamily="34" charset="0"/>
                 <a:ea typeface="Calibri" pitchFamily="34" charset="-122"/>
@@ -2958,7 +2900,7 @@
             <a:r>
               <a:rPr lang="en-US" sz="1350" dirty="0">
                 <a:solidFill>
-                  <a:srgbClr val="E6EDF3"/>
+                  <a:srgbClr val="1F2937"/>
                 </a:solidFill>
                 <a:latin typeface="Calibri" pitchFamily="34" charset="0"/>
                 <a:ea typeface="Calibri" pitchFamily="34" charset="-122"/>
@@ -2997,7 +2939,7 @@
             <a:r>
               <a:rPr lang="en-US" sz="900" dirty="0">
                 <a:solidFill>
-                  <a:srgbClr val="94A3B8"/>
+                  <a:srgbClr val="64748B"/>
                 </a:solidFill>
                 <a:latin typeface="Calibri" pitchFamily="34" charset="0"/>
                 <a:ea typeface="Calibri" pitchFamily="34" charset="-122"/>
@@ -3009,38 +2951,9 @@
           </a:p>
         </p:txBody>
       </p:sp>
-      <p:sp>
-        <p:nvSpPr>
-          <p:cNvPr id="15" name="Shape 12"/>
-          <p:cNvSpPr/>
-          <p:nvPr/>
-        </p:nvSpPr>
-        <p:spPr>
-          <a:xfrm>
-            <a:off x="7772400" y="4590288"/>
-            <a:ext cx="969264" cy="475488"/>
-          </a:xfrm>
-          <a:prstGeom prst="roundRect">
-            <a:avLst>
-              <a:gd name="adj" fmla="val 11538"/>
-            </a:avLst>
-          </a:prstGeom>
-          <a:solidFill>
-            <a:srgbClr val="FFFFFF"/>
-          </a:solidFill>
-          <a:ln/>
-          <a:effectLst>
-            <a:outerShdw sx="100000" sy="100000" kx="0" ky="0" algn="bl" rotWithShape="0" blurRad="101600" dist="38100" dir="5400000">
-              <a:srgbClr val="000000">
-                <a:alpha val="35000"/>
-              </a:srgbClr>
-            </a:outerShdw>
-          </a:effectLst>
-        </p:spPr>
-      </p:sp>
       <p:pic>
         <p:nvPicPr>
-          <p:cNvPr id="16" name="Image 1" descr="/Users/pop7/Library/CloudStorage/OneDrive-MonsterConnectCo.,Ltd/Lecture/KOSEN69 - software-security/slides/pptx/assets/logo-small.png">    </p:cNvPr>
+          <p:cNvPr id="15" name="Image 1" descr="/Users/pop7/Library/CloudStorage/OneDrive-MonsterConnectCo.,Ltd/Lecture/KOSEN69 - software-security/slides/pptx/assets/logo-small.png">    </p:cNvPr>
           <p:cNvPicPr>
             <a:picLocks noChangeAspect="1"/>
           </p:cNvPicPr>
@@ -3054,7 +2967,7 @@
         </p:blipFill>
         <p:spPr>
           <a:xfrm>
-            <a:off x="7872984" y="4681728"/>
+            <a:off x="7882128" y="4700016"/>
             <a:ext cx="768096" cy="356616"/>
           </a:xfrm>
           <a:prstGeom prst="rect">
@@ -3076,7 +2989,7 @@
     <p:bg>
       <p:bgPr>
         <a:solidFill>
-          <a:srgbClr val="0E1726"/>
+          <a:srgbClr val="FFFFFF"/>
         </a:solidFill>
       </p:bgPr>
     </p:bg>
@@ -3113,9 +3026,9 @@
           </a:solidFill>
           <a:ln/>
           <a:effectLst>
-            <a:outerShdw sx="100000" sy="100000" kx="0" ky="0" algn="bl" rotWithShape="0" blurRad="101600" dist="38100" dir="5400000">
+            <a:outerShdw sx="100000" sy="100000" kx="0" ky="0" algn="bl" rotWithShape="0" blurRad="76200" dist="25400" dir="5400000">
               <a:srgbClr val="000000">
-                <a:alpha val="35000"/>
+                <a:alpha val="12000"/>
               </a:srgbClr>
             </a:outerShdw>
           </a:effectLst>
@@ -3172,7 +3085,7 @@
             <a:r>
               <a:rPr lang="en-US" sz="2600" b="1" dirty="0">
                 <a:solidFill>
-                  <a:srgbClr val="E6EDF3"/>
+                  <a:srgbClr val="1F2937"/>
                 </a:solidFill>
                 <a:latin typeface="Arial" pitchFamily="34" charset="0"/>
                 <a:ea typeface="Arial" pitchFamily="34" charset="-122"/>
@@ -3201,13 +3114,13 @@
             </a:avLst>
           </a:prstGeom>
           <a:solidFill>
-            <a:srgbClr val="18243A"/>
+            <a:srgbClr val="F1F5F9"/>
           </a:solidFill>
           <a:ln/>
           <a:effectLst>
-            <a:outerShdw sx="100000" sy="100000" kx="0" ky="0" algn="bl" rotWithShape="0" blurRad="101600" dist="38100" dir="5400000">
+            <a:outerShdw sx="100000" sy="100000" kx="0" ky="0" algn="bl" rotWithShape="0" blurRad="76200" dist="25400" dir="5400000">
               <a:srgbClr val="000000">
-                <a:alpha val="35000"/>
+                <a:alpha val="12000"/>
               </a:srgbClr>
             </a:outerShdw>
           </a:effectLst>
@@ -3244,7 +3157,7 @@
             <a:r>
               <a:rPr lang="en-US" sz="1400" dirty="0">
                 <a:solidFill>
-                  <a:srgbClr val="E6EDF3"/>
+                  <a:srgbClr val="1F2937"/>
                 </a:solidFill>
                 <a:latin typeface="Calibri" pitchFamily="34" charset="0"/>
                 <a:ea typeface="Calibri" pitchFamily="34" charset="-122"/>
@@ -3265,7 +3178,7 @@
             <a:r>
               <a:rPr lang="en-US" sz="1400" dirty="0">
                 <a:solidFill>
-                  <a:srgbClr val="E6EDF3"/>
+                  <a:srgbClr val="1F2937"/>
                 </a:solidFill>
                 <a:latin typeface="Calibri" pitchFamily="34" charset="0"/>
                 <a:ea typeface="Calibri" pitchFamily="34" charset="-122"/>
@@ -3286,7 +3199,7 @@
             <a:r>
               <a:rPr lang="en-US" sz="1400" dirty="0">
                 <a:solidFill>
-                  <a:srgbClr val="E6EDF3"/>
+                  <a:srgbClr val="1F2937"/>
                 </a:solidFill>
                 <a:latin typeface="Calibri" pitchFamily="34" charset="0"/>
                 <a:ea typeface="Calibri" pitchFamily="34" charset="-122"/>
@@ -3325,7 +3238,7 @@
             <a:r>
               <a:rPr lang="en-US" sz="900" dirty="0">
                 <a:solidFill>
-                  <a:srgbClr val="94A3B8"/>
+                  <a:srgbClr val="64748B"/>
                 </a:solidFill>
                 <a:latin typeface="Calibri" pitchFamily="34" charset="0"/>
                 <a:ea typeface="Calibri" pitchFamily="34" charset="-122"/>
@@ -3337,38 +3250,9 @@
           </a:p>
         </p:txBody>
       </p:sp>
-      <p:sp>
-        <p:nvSpPr>
-          <p:cNvPr id="8" name="Shape 5"/>
-          <p:cNvSpPr/>
-          <p:nvPr/>
-        </p:nvSpPr>
-        <p:spPr>
-          <a:xfrm>
-            <a:off x="7772400" y="4590288"/>
-            <a:ext cx="969264" cy="475488"/>
-          </a:xfrm>
-          <a:prstGeom prst="roundRect">
-            <a:avLst>
-              <a:gd name="adj" fmla="val 11538"/>
-            </a:avLst>
-          </a:prstGeom>
-          <a:solidFill>
-            <a:srgbClr val="FFFFFF"/>
-          </a:solidFill>
-          <a:ln/>
-          <a:effectLst>
-            <a:outerShdw sx="100000" sy="100000" kx="0" ky="0" algn="bl" rotWithShape="0" blurRad="101600" dist="38100" dir="5400000">
-              <a:srgbClr val="000000">
-                <a:alpha val="35000"/>
-              </a:srgbClr>
-            </a:outerShdw>
-          </a:effectLst>
-        </p:spPr>
-      </p:sp>
       <p:pic>
         <p:nvPicPr>
-          <p:cNvPr id="9" name="Image 1" descr="/Users/pop7/Library/CloudStorage/OneDrive-MonsterConnectCo.,Ltd/Lecture/KOSEN69 - software-security/slides/pptx/assets/logo-small.png">    </p:cNvPr>
+          <p:cNvPr id="8" name="Image 1" descr="/Users/pop7/Library/CloudStorage/OneDrive-MonsterConnectCo.,Ltd/Lecture/KOSEN69 - software-security/slides/pptx/assets/logo-small.png">    </p:cNvPr>
           <p:cNvPicPr>
             <a:picLocks noChangeAspect="1"/>
           </p:cNvPicPr>
@@ -3382,7 +3266,7 @@
         </p:blipFill>
         <p:spPr>
           <a:xfrm>
-            <a:off x="7872984" y="4681728"/>
+            <a:off x="7882128" y="4700016"/>
             <a:ext cx="768096" cy="356616"/>
           </a:xfrm>
           <a:prstGeom prst="rect">
@@ -3404,7 +3288,7 @@
     <p:bg>
       <p:bgPr>
         <a:solidFill>
-          <a:srgbClr val="0E1726"/>
+          <a:srgbClr val="FFFFFF"/>
         </a:solidFill>
       </p:bgPr>
     </p:bg>
@@ -3441,9 +3325,9 @@
           </a:solidFill>
           <a:ln/>
           <a:effectLst>
-            <a:outerShdw sx="100000" sy="100000" kx="0" ky="0" algn="bl" rotWithShape="0" blurRad="101600" dist="38100" dir="5400000">
+            <a:outerShdw sx="100000" sy="100000" kx="0" ky="0" algn="bl" rotWithShape="0" blurRad="76200" dist="25400" dir="5400000">
               <a:srgbClr val="000000">
-                <a:alpha val="35000"/>
+                <a:alpha val="12000"/>
               </a:srgbClr>
             </a:outerShdw>
           </a:effectLst>
@@ -3500,7 +3384,7 @@
             <a:r>
               <a:rPr lang="en-US" sz="2600" b="1" dirty="0">
                 <a:solidFill>
-                  <a:srgbClr val="E6EDF3"/>
+                  <a:srgbClr val="1F2937"/>
                 </a:solidFill>
                 <a:latin typeface="Arial" pitchFamily="34" charset="0"/>
                 <a:ea typeface="Arial" pitchFamily="34" charset="-122"/>
@@ -3529,13 +3413,13 @@
             </a:avLst>
           </a:prstGeom>
           <a:solidFill>
-            <a:srgbClr val="18243A"/>
+            <a:srgbClr val="F1F5F9"/>
           </a:solidFill>
           <a:ln/>
           <a:effectLst>
-            <a:outerShdw sx="100000" sy="100000" kx="0" ky="0" algn="bl" rotWithShape="0" blurRad="101600" dist="38100" dir="5400000">
+            <a:outerShdw sx="100000" sy="100000" kx="0" ky="0" algn="bl" rotWithShape="0" blurRad="76200" dist="25400" dir="5400000">
               <a:srgbClr val="000000">
-                <a:alpha val="35000"/>
+                <a:alpha val="12000"/>
               </a:srgbClr>
             </a:outerShdw>
           </a:effectLst>
@@ -3572,7 +3456,7 @@
             <a:r>
               <a:rPr lang="en-US" sz="1400" dirty="0">
                 <a:solidFill>
-                  <a:srgbClr val="E6EDF3"/>
+                  <a:srgbClr val="1F2937"/>
                 </a:solidFill>
                 <a:latin typeface="Calibri" pitchFamily="34" charset="0"/>
                 <a:ea typeface="Calibri" pitchFamily="34" charset="-122"/>
@@ -3593,7 +3477,7 @@
             <a:r>
               <a:rPr lang="en-US" sz="1400" dirty="0">
                 <a:solidFill>
-                  <a:srgbClr val="E6EDF3"/>
+                  <a:srgbClr val="1F2937"/>
                 </a:solidFill>
                 <a:latin typeface="Calibri" pitchFamily="34" charset="0"/>
                 <a:ea typeface="Calibri" pitchFamily="34" charset="-122"/>
@@ -3614,7 +3498,7 @@
             <a:r>
               <a:rPr lang="en-US" sz="1400" dirty="0">
                 <a:solidFill>
-                  <a:srgbClr val="E6EDF3"/>
+                  <a:srgbClr val="1F2937"/>
                 </a:solidFill>
                 <a:latin typeface="Calibri" pitchFamily="34" charset="0"/>
                 <a:ea typeface="Calibri" pitchFamily="34" charset="-122"/>
@@ -3653,7 +3537,7 @@
             <a:r>
               <a:rPr lang="en-US" sz="900" dirty="0">
                 <a:solidFill>
-                  <a:srgbClr val="94A3B8"/>
+                  <a:srgbClr val="64748B"/>
                 </a:solidFill>
                 <a:latin typeface="Calibri" pitchFamily="34" charset="0"/>
                 <a:ea typeface="Calibri" pitchFamily="34" charset="-122"/>
@@ -3665,38 +3549,9 @@
           </a:p>
         </p:txBody>
       </p:sp>
-      <p:sp>
-        <p:nvSpPr>
-          <p:cNvPr id="8" name="Shape 5"/>
-          <p:cNvSpPr/>
-          <p:nvPr/>
-        </p:nvSpPr>
-        <p:spPr>
-          <a:xfrm>
-            <a:off x="7772400" y="4590288"/>
-            <a:ext cx="969264" cy="475488"/>
-          </a:xfrm>
-          <a:prstGeom prst="roundRect">
-            <a:avLst>
-              <a:gd name="adj" fmla="val 11538"/>
-            </a:avLst>
-          </a:prstGeom>
-          <a:solidFill>
-            <a:srgbClr val="FFFFFF"/>
-          </a:solidFill>
-          <a:ln/>
-          <a:effectLst>
-            <a:outerShdw sx="100000" sy="100000" kx="0" ky="0" algn="bl" rotWithShape="0" blurRad="101600" dist="38100" dir="5400000">
-              <a:srgbClr val="000000">
-                <a:alpha val="35000"/>
-              </a:srgbClr>
-            </a:outerShdw>
-          </a:effectLst>
-        </p:spPr>
-      </p:sp>
       <p:pic>
         <p:nvPicPr>
-          <p:cNvPr id="9" name="Image 1" descr="/Users/pop7/Library/CloudStorage/OneDrive-MonsterConnectCo.,Ltd/Lecture/KOSEN69 - software-security/slides/pptx/assets/logo-small.png">    </p:cNvPr>
+          <p:cNvPr id="8" name="Image 1" descr="/Users/pop7/Library/CloudStorage/OneDrive-MonsterConnectCo.,Ltd/Lecture/KOSEN69 - software-security/slides/pptx/assets/logo-small.png">    </p:cNvPr>
           <p:cNvPicPr>
             <a:picLocks noChangeAspect="1"/>
           </p:cNvPicPr>
@@ -3710,7 +3565,7 @@
         </p:blipFill>
         <p:spPr>
           <a:xfrm>
-            <a:off x="7872984" y="4681728"/>
+            <a:off x="7882128" y="4700016"/>
             <a:ext cx="768096" cy="356616"/>
           </a:xfrm>
           <a:prstGeom prst="rect">
@@ -3732,7 +3587,7 @@
     <p:bg>
       <p:bgPr>
         <a:solidFill>
-          <a:srgbClr val="0E1726"/>
+          <a:srgbClr val="FFFFFF"/>
         </a:solidFill>
       </p:bgPr>
     </p:bg>
@@ -3777,7 +3632,7 @@
             <a:r>
               <a:rPr lang="en-US" sz="4600" b="1" dirty="0">
                 <a:solidFill>
-                  <a:srgbClr val="E6EDF3"/>
+                  <a:srgbClr val="1F2937"/>
                 </a:solidFill>
                 <a:latin typeface="Arial" pitchFamily="34" charset="0"/>
                 <a:ea typeface="Arial" pitchFamily="34" charset="-122"/>
@@ -3828,38 +3683,9 @@
           </a:p>
         </p:txBody>
       </p:sp>
-      <p:sp>
-        <p:nvSpPr>
-          <p:cNvPr id="4" name="Shape 2"/>
-          <p:cNvSpPr/>
-          <p:nvPr/>
-        </p:nvSpPr>
-        <p:spPr>
-          <a:xfrm>
-            <a:off x="7772400" y="4590288"/>
-            <a:ext cx="969264" cy="475488"/>
-          </a:xfrm>
-          <a:prstGeom prst="roundRect">
-            <a:avLst>
-              <a:gd name="adj" fmla="val 11538"/>
-            </a:avLst>
-          </a:prstGeom>
-          <a:solidFill>
-            <a:srgbClr val="FFFFFF"/>
-          </a:solidFill>
-          <a:ln/>
-          <a:effectLst>
-            <a:outerShdw sx="100000" sy="100000" kx="0" ky="0" algn="bl" rotWithShape="0" blurRad="101600" dist="38100" dir="5400000">
-              <a:srgbClr val="000000">
-                <a:alpha val="35000"/>
-              </a:srgbClr>
-            </a:outerShdw>
-          </a:effectLst>
-        </p:spPr>
-      </p:sp>
       <p:pic>
         <p:nvPicPr>
-          <p:cNvPr id="5" name="Image 0" descr="/Users/pop7/Library/CloudStorage/OneDrive-MonsterConnectCo.,Ltd/Lecture/KOSEN69 - software-security/slides/pptx/assets/logo-small.png">    </p:cNvPr>
+          <p:cNvPr id="4" name="Image 0" descr="/Users/pop7/Library/CloudStorage/OneDrive-MonsterConnectCo.,Ltd/Lecture/KOSEN69 - software-security/slides/pptx/assets/logo-small.png">    </p:cNvPr>
           <p:cNvPicPr>
             <a:picLocks noChangeAspect="1"/>
           </p:cNvPicPr>
@@ -3873,7 +3699,7 @@
         </p:blipFill>
         <p:spPr>
           <a:xfrm>
-            <a:off x="7872984" y="4681728"/>
+            <a:off x="7882128" y="4700016"/>
             <a:ext cx="768096" cy="356616"/>
           </a:xfrm>
           <a:prstGeom prst="rect">
@@ -3895,7 +3721,7 @@
     <p:bg>
       <p:bgPr>
         <a:solidFill>
-          <a:srgbClr val="0E1726"/>
+          <a:srgbClr val="FFFFFF"/>
         </a:solidFill>
       </p:bgPr>
     </p:bg>
@@ -3932,9 +3758,9 @@
           </a:solidFill>
           <a:ln/>
           <a:effectLst>
-            <a:outerShdw sx="100000" sy="100000" kx="0" ky="0" algn="bl" rotWithShape="0" blurRad="101600" dist="38100" dir="5400000">
+            <a:outerShdw sx="100000" sy="100000" kx="0" ky="0" algn="bl" rotWithShape="0" blurRad="76200" dist="25400" dir="5400000">
               <a:srgbClr val="000000">
-                <a:alpha val="35000"/>
+                <a:alpha val="12000"/>
               </a:srgbClr>
             </a:outerShdw>
           </a:effectLst>
@@ -3991,7 +3817,7 @@
             <a:r>
               <a:rPr lang="en-US" sz="2600" b="1" dirty="0">
                 <a:solidFill>
-                  <a:srgbClr val="E6EDF3"/>
+                  <a:srgbClr val="1F2937"/>
                 </a:solidFill>
                 <a:latin typeface="Arial" pitchFamily="34" charset="0"/>
                 <a:ea typeface="Arial" pitchFamily="34" charset="-122"/>
@@ -4020,13 +3846,13 @@
             </a:avLst>
           </a:prstGeom>
           <a:solidFill>
-            <a:srgbClr val="18243A"/>
+            <a:srgbClr val="F1F5F9"/>
           </a:solidFill>
           <a:ln/>
           <a:effectLst>
-            <a:outerShdw sx="100000" sy="100000" kx="0" ky="0" algn="bl" rotWithShape="0" blurRad="101600" dist="38100" dir="5400000">
+            <a:outerShdw sx="100000" sy="100000" kx="0" ky="0" algn="bl" rotWithShape="0" blurRad="76200" dist="25400" dir="5400000">
               <a:srgbClr val="000000">
-                <a:alpha val="35000"/>
+                <a:alpha val="12000"/>
               </a:srgbClr>
             </a:outerShdw>
           </a:effectLst>
@@ -4063,7 +3889,7 @@
             <a:r>
               <a:rPr lang="en-US" sz="1400" dirty="0">
                 <a:solidFill>
-                  <a:srgbClr val="E6EDF3"/>
+                  <a:srgbClr val="1F2937"/>
                 </a:solidFill>
                 <a:latin typeface="Calibri" pitchFamily="34" charset="0"/>
                 <a:ea typeface="Calibri" pitchFamily="34" charset="-122"/>
@@ -4084,7 +3910,7 @@
             <a:r>
               <a:rPr lang="en-US" sz="1400" dirty="0">
                 <a:solidFill>
-                  <a:srgbClr val="E6EDF3"/>
+                  <a:srgbClr val="1F2937"/>
                 </a:solidFill>
                 <a:latin typeface="Calibri" pitchFamily="34" charset="0"/>
                 <a:ea typeface="Calibri" pitchFamily="34" charset="-122"/>
@@ -4105,7 +3931,7 @@
             <a:r>
               <a:rPr lang="en-US" sz="1400" dirty="0">
                 <a:solidFill>
-                  <a:srgbClr val="E6EDF3"/>
+                  <a:srgbClr val="1F2937"/>
                 </a:solidFill>
                 <a:latin typeface="Calibri" pitchFamily="34" charset="0"/>
                 <a:ea typeface="Calibri" pitchFamily="34" charset="-122"/>
@@ -4126,7 +3952,7 @@
             <a:r>
               <a:rPr lang="en-US" sz="1400" dirty="0">
                 <a:solidFill>
-                  <a:srgbClr val="E6EDF3"/>
+                  <a:srgbClr val="1F2937"/>
                 </a:solidFill>
                 <a:latin typeface="Calibri" pitchFamily="34" charset="0"/>
                 <a:ea typeface="Calibri" pitchFamily="34" charset="-122"/>
@@ -4147,7 +3973,7 @@
             <a:r>
               <a:rPr lang="en-US" sz="1400" dirty="0">
                 <a:solidFill>
-                  <a:srgbClr val="E6EDF3"/>
+                  <a:srgbClr val="1F2937"/>
                 </a:solidFill>
                 <a:latin typeface="Calibri" pitchFamily="34" charset="0"/>
                 <a:ea typeface="Calibri" pitchFamily="34" charset="-122"/>
@@ -4186,7 +4012,7 @@
             <a:r>
               <a:rPr lang="en-US" sz="900" dirty="0">
                 <a:solidFill>
-                  <a:srgbClr val="94A3B8"/>
+                  <a:srgbClr val="64748B"/>
                 </a:solidFill>
                 <a:latin typeface="Calibri" pitchFamily="34" charset="0"/>
                 <a:ea typeface="Calibri" pitchFamily="34" charset="-122"/>
@@ -4198,38 +4024,9 @@
           </a:p>
         </p:txBody>
       </p:sp>
-      <p:sp>
-        <p:nvSpPr>
-          <p:cNvPr id="8" name="Shape 5"/>
-          <p:cNvSpPr/>
-          <p:nvPr/>
-        </p:nvSpPr>
-        <p:spPr>
-          <a:xfrm>
-            <a:off x="7772400" y="4590288"/>
-            <a:ext cx="969264" cy="475488"/>
-          </a:xfrm>
-          <a:prstGeom prst="roundRect">
-            <a:avLst>
-              <a:gd name="adj" fmla="val 11538"/>
-            </a:avLst>
-          </a:prstGeom>
-          <a:solidFill>
-            <a:srgbClr val="FFFFFF"/>
-          </a:solidFill>
-          <a:ln/>
-          <a:effectLst>
-            <a:outerShdw sx="100000" sy="100000" kx="0" ky="0" algn="bl" rotWithShape="0" blurRad="101600" dist="38100" dir="5400000">
-              <a:srgbClr val="000000">
-                <a:alpha val="35000"/>
-              </a:srgbClr>
-            </a:outerShdw>
-          </a:effectLst>
-        </p:spPr>
-      </p:sp>
       <p:pic>
         <p:nvPicPr>
-          <p:cNvPr id="9" name="Image 1" descr="/Users/pop7/Library/CloudStorage/OneDrive-MonsterConnectCo.,Ltd/Lecture/KOSEN69 - software-security/slides/pptx/assets/logo-small.png">    </p:cNvPr>
+          <p:cNvPr id="8" name="Image 1" descr="/Users/pop7/Library/CloudStorage/OneDrive-MonsterConnectCo.,Ltd/Lecture/KOSEN69 - software-security/slides/pptx/assets/logo-small.png">    </p:cNvPr>
           <p:cNvPicPr>
             <a:picLocks noChangeAspect="1"/>
           </p:cNvPicPr>
@@ -4243,7 +4040,7 @@
         </p:blipFill>
         <p:spPr>
           <a:xfrm>
-            <a:off x="7872984" y="4681728"/>
+            <a:off x="7882128" y="4700016"/>
             <a:ext cx="768096" cy="356616"/>
           </a:xfrm>
           <a:prstGeom prst="rect">
@@ -4265,7 +4062,7 @@
     <p:bg>
       <p:bgPr>
         <a:solidFill>
-          <a:srgbClr val="0E1726"/>
+          <a:srgbClr val="FFFFFF"/>
         </a:solidFill>
       </p:bgPr>
     </p:bg>
@@ -4302,9 +4099,9 @@
           </a:solidFill>
           <a:ln/>
           <a:effectLst>
-            <a:outerShdw sx="100000" sy="100000" kx="0" ky="0" algn="bl" rotWithShape="0" blurRad="101600" dist="38100" dir="5400000">
+            <a:outerShdw sx="100000" sy="100000" kx="0" ky="0" algn="bl" rotWithShape="0" blurRad="76200" dist="25400" dir="5400000">
               <a:srgbClr val="000000">
-                <a:alpha val="35000"/>
+                <a:alpha val="12000"/>
               </a:srgbClr>
             </a:outerShdw>
           </a:effectLst>
@@ -4361,7 +4158,7 @@
             <a:r>
               <a:rPr lang="en-US" sz="2600" b="1" dirty="0">
                 <a:solidFill>
-                  <a:srgbClr val="E6EDF3"/>
+                  <a:srgbClr val="1F2937"/>
                 </a:solidFill>
                 <a:latin typeface="Arial" pitchFamily="34" charset="0"/>
                 <a:ea typeface="Arial" pitchFamily="34" charset="-122"/>
@@ -4390,13 +4187,13 @@
             </a:avLst>
           </a:prstGeom>
           <a:solidFill>
-            <a:srgbClr val="18243A"/>
+            <a:srgbClr val="F1F5F9"/>
           </a:solidFill>
           <a:ln/>
           <a:effectLst>
-            <a:outerShdw sx="100000" sy="100000" kx="0" ky="0" algn="bl" rotWithShape="0" blurRad="101600" dist="38100" dir="5400000">
+            <a:outerShdw sx="100000" sy="100000" kx="0" ky="0" algn="bl" rotWithShape="0" blurRad="76200" dist="25400" dir="5400000">
               <a:srgbClr val="000000">
-                <a:alpha val="35000"/>
+                <a:alpha val="12000"/>
               </a:srgbClr>
             </a:outerShdw>
           </a:effectLst>
@@ -4433,7 +4230,7 @@
             <a:r>
               <a:rPr lang="en-US" sz="1400" dirty="0">
                 <a:solidFill>
-                  <a:srgbClr val="E6EDF3"/>
+                  <a:srgbClr val="1F2937"/>
                 </a:solidFill>
                 <a:latin typeface="Calibri" pitchFamily="34" charset="0"/>
                 <a:ea typeface="Calibri" pitchFamily="34" charset="-122"/>
@@ -4454,7 +4251,7 @@
             <a:r>
               <a:rPr lang="en-US" sz="1400" dirty="0">
                 <a:solidFill>
-                  <a:srgbClr val="E6EDF3"/>
+                  <a:srgbClr val="1F2937"/>
                 </a:solidFill>
                 <a:latin typeface="Calibri" pitchFamily="34" charset="0"/>
                 <a:ea typeface="Calibri" pitchFamily="34" charset="-122"/>
@@ -4475,7 +4272,7 @@
             <a:r>
               <a:rPr lang="en-US" sz="1400" dirty="0">
                 <a:solidFill>
-                  <a:srgbClr val="E6EDF3"/>
+                  <a:srgbClr val="1F2937"/>
                 </a:solidFill>
                 <a:latin typeface="Calibri" pitchFamily="34" charset="0"/>
                 <a:ea typeface="Calibri" pitchFamily="34" charset="-122"/>
@@ -4514,7 +4311,7 @@
             <a:r>
               <a:rPr lang="en-US" sz="900" dirty="0">
                 <a:solidFill>
-                  <a:srgbClr val="94A3B8"/>
+                  <a:srgbClr val="64748B"/>
                 </a:solidFill>
                 <a:latin typeface="Calibri" pitchFamily="34" charset="0"/>
                 <a:ea typeface="Calibri" pitchFamily="34" charset="-122"/>
@@ -4526,38 +4323,9 @@
           </a:p>
         </p:txBody>
       </p:sp>
-      <p:sp>
-        <p:nvSpPr>
-          <p:cNvPr id="8" name="Shape 5"/>
-          <p:cNvSpPr/>
-          <p:nvPr/>
-        </p:nvSpPr>
-        <p:spPr>
-          <a:xfrm>
-            <a:off x="7772400" y="4590288"/>
-            <a:ext cx="969264" cy="475488"/>
-          </a:xfrm>
-          <a:prstGeom prst="roundRect">
-            <a:avLst>
-              <a:gd name="adj" fmla="val 11538"/>
-            </a:avLst>
-          </a:prstGeom>
-          <a:solidFill>
-            <a:srgbClr val="FFFFFF"/>
-          </a:solidFill>
-          <a:ln/>
-          <a:effectLst>
-            <a:outerShdw sx="100000" sy="100000" kx="0" ky="0" algn="bl" rotWithShape="0" blurRad="101600" dist="38100" dir="5400000">
-              <a:srgbClr val="000000">
-                <a:alpha val="35000"/>
-              </a:srgbClr>
-            </a:outerShdw>
-          </a:effectLst>
-        </p:spPr>
-      </p:sp>
       <p:pic>
         <p:nvPicPr>
-          <p:cNvPr id="9" name="Image 1" descr="/Users/pop7/Library/CloudStorage/OneDrive-MonsterConnectCo.,Ltd/Lecture/KOSEN69 - software-security/slides/pptx/assets/logo-small.png">    </p:cNvPr>
+          <p:cNvPr id="8" name="Image 1" descr="/Users/pop7/Library/CloudStorage/OneDrive-MonsterConnectCo.,Ltd/Lecture/KOSEN69 - software-security/slides/pptx/assets/logo-small.png">    </p:cNvPr>
           <p:cNvPicPr>
             <a:picLocks noChangeAspect="1"/>
           </p:cNvPicPr>
@@ -4571,7 +4339,7 @@
         </p:blipFill>
         <p:spPr>
           <a:xfrm>
-            <a:off x="7872984" y="4681728"/>
+            <a:off x="7882128" y="4700016"/>
             <a:ext cx="768096" cy="356616"/>
           </a:xfrm>
           <a:prstGeom prst="rect">
@@ -4593,7 +4361,7 @@
     <p:bg>
       <p:bgPr>
         <a:solidFill>
-          <a:srgbClr val="0E1726"/>
+          <a:srgbClr val="FFFFFF"/>
         </a:solidFill>
       </p:bgPr>
     </p:bg>
@@ -4630,9 +4398,9 @@
           </a:solidFill>
           <a:ln/>
           <a:effectLst>
-            <a:outerShdw sx="100000" sy="100000" kx="0" ky="0" algn="bl" rotWithShape="0" blurRad="101600" dist="38100" dir="5400000">
+            <a:outerShdw sx="100000" sy="100000" kx="0" ky="0" algn="bl" rotWithShape="0" blurRad="76200" dist="25400" dir="5400000">
               <a:srgbClr val="000000">
-                <a:alpha val="35000"/>
+                <a:alpha val="12000"/>
               </a:srgbClr>
             </a:outerShdw>
           </a:effectLst>
@@ -4689,7 +4457,7 @@
             <a:r>
               <a:rPr lang="en-US" sz="2600" b="1" dirty="0">
                 <a:solidFill>
-                  <a:srgbClr val="E6EDF3"/>
+                  <a:srgbClr val="1F2937"/>
                 </a:solidFill>
                 <a:latin typeface="Arial" pitchFamily="34" charset="0"/>
                 <a:ea typeface="Arial" pitchFamily="34" charset="-122"/>
@@ -4751,7 +4519,7 @@
                   <a:tcPr marL="76200" marR="76200" marT="38100" marB="38100" anchor="ctr">
                     <a:lnL w="12700" cap="flat" cmpd="sng" algn="ctr">
                       <a:solidFill>
-                        <a:srgbClr val="0E1726"/>
+                        <a:srgbClr val="FFFFFF"/>
                       </a:solidFill>
                       <a:prstDash val="solid"/>
                       <a:round/>
@@ -4760,7 +4528,7 @@
                     </a:lnL>
                     <a:lnR w="12700" cap="flat" cmpd="sng" algn="ctr">
                       <a:solidFill>
-                        <a:srgbClr val="0E1726"/>
+                        <a:srgbClr val="FFFFFF"/>
                       </a:solidFill>
                       <a:prstDash val="solid"/>
                       <a:round/>
@@ -4769,7 +4537,7 @@
                     </a:lnR>
                     <a:lnT w="12700" cap="flat" cmpd="sng" algn="ctr">
                       <a:solidFill>
-                        <a:srgbClr val="0E1726"/>
+                        <a:srgbClr val="FFFFFF"/>
                       </a:solidFill>
                       <a:prstDash val="solid"/>
                       <a:round/>
@@ -4778,7 +4546,7 @@
                     </a:lnT>
                     <a:lnB w="12700" cap="flat" cmpd="sng" algn="ctr">
                       <a:solidFill>
-                        <a:srgbClr val="0E1726"/>
+                        <a:srgbClr val="FFFFFF"/>
                       </a:solidFill>
                       <a:prstDash val="solid"/>
                       <a:round/>
@@ -4812,7 +4580,7 @@
                   <a:tcPr marL="76200" marR="76200" marT="38100" marB="38100" anchor="ctr">
                     <a:lnL w="12700" cap="flat" cmpd="sng" algn="ctr">
                       <a:solidFill>
-                        <a:srgbClr val="0E1726"/>
+                        <a:srgbClr val="FFFFFF"/>
                       </a:solidFill>
                       <a:prstDash val="solid"/>
                       <a:round/>
@@ -4821,7 +4589,7 @@
                     </a:lnL>
                     <a:lnR w="12700" cap="flat" cmpd="sng" algn="ctr">
                       <a:solidFill>
-                        <a:srgbClr val="0E1726"/>
+                        <a:srgbClr val="FFFFFF"/>
                       </a:solidFill>
                       <a:prstDash val="solid"/>
                       <a:round/>
@@ -4830,7 +4598,7 @@
                     </a:lnR>
                     <a:lnT w="12700" cap="flat" cmpd="sng" algn="ctr">
                       <a:solidFill>
-                        <a:srgbClr val="0E1726"/>
+                        <a:srgbClr val="FFFFFF"/>
                       </a:solidFill>
                       <a:prstDash val="solid"/>
                       <a:round/>
@@ -4839,7 +4607,7 @@
                     </a:lnT>
                     <a:lnB w="12700" cap="flat" cmpd="sng" algn="ctr">
                       <a:solidFill>
-                        <a:srgbClr val="0E1726"/>
+                        <a:srgbClr val="FFFFFF"/>
                       </a:solidFill>
                       <a:prstDash val="solid"/>
                       <a:round/>
@@ -4873,7 +4641,7 @@
                   <a:tcPr marL="76200" marR="76200" marT="38100" marB="38100" anchor="ctr">
                     <a:lnL w="12700" cap="flat" cmpd="sng" algn="ctr">
                       <a:solidFill>
-                        <a:srgbClr val="0E1726"/>
+                        <a:srgbClr val="FFFFFF"/>
                       </a:solidFill>
                       <a:prstDash val="solid"/>
                       <a:round/>
@@ -4882,7 +4650,7 @@
                     </a:lnL>
                     <a:lnR w="12700" cap="flat" cmpd="sng" algn="ctr">
                       <a:solidFill>
-                        <a:srgbClr val="0E1726"/>
+                        <a:srgbClr val="FFFFFF"/>
                       </a:solidFill>
                       <a:prstDash val="solid"/>
                       <a:round/>
@@ -4891,7 +4659,7 @@
                     </a:lnR>
                     <a:lnT w="12700" cap="flat" cmpd="sng" algn="ctr">
                       <a:solidFill>
-                        <a:srgbClr val="0E1726"/>
+                        <a:srgbClr val="FFFFFF"/>
                       </a:solidFill>
                       <a:prstDash val="solid"/>
                       <a:round/>
@@ -4900,7 +4668,7 @@
                     </a:lnT>
                     <a:lnB w="12700" cap="flat" cmpd="sng" algn="ctr">
                       <a:solidFill>
-                        <a:srgbClr val="0E1726"/>
+                        <a:srgbClr val="FFFFFF"/>
                       </a:solidFill>
                       <a:prstDash val="solid"/>
                       <a:round/>
@@ -4925,7 +4693,7 @@
                       <a:r>
                         <a:rPr lang="en-US" sz="1200" dirty="0">
                           <a:solidFill>
-                            <a:srgbClr val="E6EDF3"/>
+                            <a:srgbClr val="1F2937"/>
                           </a:solidFill>
                         </a:rPr>
                         <a:t>LLM04 Data/Model Poisoning</a:t>
@@ -4936,7 +4704,7 @@
                   <a:tcPr marL="76200" marR="76200" marT="38100" marB="38100" anchor="ctr">
                     <a:lnL w="12700" cap="flat" cmpd="sng" algn="ctr">
                       <a:solidFill>
-                        <a:srgbClr val="0E1726"/>
+                        <a:srgbClr val="FFFFFF"/>
                       </a:solidFill>
                       <a:prstDash val="solid"/>
                       <a:round/>
@@ -4945,7 +4713,7 @@
                     </a:lnL>
                     <a:lnR w="12700" cap="flat" cmpd="sng" algn="ctr">
                       <a:solidFill>
-                        <a:srgbClr val="0E1726"/>
+                        <a:srgbClr val="FFFFFF"/>
                       </a:solidFill>
                       <a:prstDash val="solid"/>
                       <a:round/>
@@ -4954,7 +4722,7 @@
                     </a:lnR>
                     <a:lnT w="12700" cap="flat" cmpd="sng" algn="ctr">
                       <a:solidFill>
-                        <a:srgbClr val="0E1726"/>
+                        <a:srgbClr val="FFFFFF"/>
                       </a:solidFill>
                       <a:prstDash val="solid"/>
                       <a:round/>
@@ -4963,7 +4731,7 @@
                     </a:lnT>
                     <a:lnB w="12700" cap="flat" cmpd="sng" algn="ctr">
                       <a:solidFill>
-                        <a:srgbClr val="0E1726"/>
+                        <a:srgbClr val="FFFFFF"/>
                       </a:solidFill>
                       <a:prstDash val="solid"/>
                       <a:round/>
@@ -4971,7 +4739,7 @@
                       <a:tailEnd type="none" w="med" len="med"/>
                     </a:lnB>
                     <a:solidFill>
-                      <a:srgbClr val="18243A"/>
+                      <a:srgbClr val="F1F5F9"/>
                     </a:solidFill>
                   </a:tcPr>
                 </a:tc>
@@ -4986,7 +4754,7 @@
                       <a:r>
                         <a:rPr lang="en-US" sz="1200" dirty="0">
                           <a:solidFill>
-                            <a:srgbClr val="E6EDF3"/>
+                            <a:srgbClr val="1F2937"/>
                           </a:solidFill>
                         </a:rPr>
                         <a:t>LLM05 Improper Output Handling</a:t>
@@ -4997,7 +4765,7 @@
                   <a:tcPr marL="76200" marR="76200" marT="38100" marB="38100" anchor="ctr">
                     <a:lnL w="12700" cap="flat" cmpd="sng" algn="ctr">
                       <a:solidFill>
-                        <a:srgbClr val="0E1726"/>
+                        <a:srgbClr val="FFFFFF"/>
                       </a:solidFill>
                       <a:prstDash val="solid"/>
                       <a:round/>
@@ -5006,7 +4774,7 @@
                     </a:lnL>
                     <a:lnR w="12700" cap="flat" cmpd="sng" algn="ctr">
                       <a:solidFill>
-                        <a:srgbClr val="0E1726"/>
+                        <a:srgbClr val="FFFFFF"/>
                       </a:solidFill>
                       <a:prstDash val="solid"/>
                       <a:round/>
@@ -5015,7 +4783,7 @@
                     </a:lnR>
                     <a:lnT w="12700" cap="flat" cmpd="sng" algn="ctr">
                       <a:solidFill>
-                        <a:srgbClr val="0E1726"/>
+                        <a:srgbClr val="FFFFFF"/>
                       </a:solidFill>
                       <a:prstDash val="solid"/>
                       <a:round/>
@@ -5024,7 +4792,7 @@
                     </a:lnT>
                     <a:lnB w="12700" cap="flat" cmpd="sng" algn="ctr">
                       <a:solidFill>
-                        <a:srgbClr val="0E1726"/>
+                        <a:srgbClr val="FFFFFF"/>
                       </a:solidFill>
                       <a:prstDash val="solid"/>
                       <a:round/>
@@ -5032,7 +4800,7 @@
                       <a:tailEnd type="none" w="med" len="med"/>
                     </a:lnB>
                     <a:solidFill>
-                      <a:srgbClr val="18243A"/>
+                      <a:srgbClr val="F1F5F9"/>
                     </a:solidFill>
                   </a:tcPr>
                 </a:tc>
@@ -5047,7 +4815,7 @@
                       <a:r>
                         <a:rPr lang="en-US" sz="1200" dirty="0">
                           <a:solidFill>
-                            <a:srgbClr val="E6EDF3"/>
+                            <a:srgbClr val="1F2937"/>
                           </a:solidFill>
                         </a:rPr>
                         <a:t>LLM06 Excessive Agency</a:t>
@@ -5058,7 +4826,7 @@
                   <a:tcPr marL="76200" marR="76200" marT="38100" marB="38100" anchor="ctr">
                     <a:lnL w="12700" cap="flat" cmpd="sng" algn="ctr">
                       <a:solidFill>
-                        <a:srgbClr val="0E1726"/>
+                        <a:srgbClr val="FFFFFF"/>
                       </a:solidFill>
                       <a:prstDash val="solid"/>
                       <a:round/>
@@ -5067,7 +4835,7 @@
                     </a:lnL>
                     <a:lnR w="12700" cap="flat" cmpd="sng" algn="ctr">
                       <a:solidFill>
-                        <a:srgbClr val="0E1726"/>
+                        <a:srgbClr val="FFFFFF"/>
                       </a:solidFill>
                       <a:prstDash val="solid"/>
                       <a:round/>
@@ -5076,7 +4844,7 @@
                     </a:lnR>
                     <a:lnT w="12700" cap="flat" cmpd="sng" algn="ctr">
                       <a:solidFill>
-                        <a:srgbClr val="0E1726"/>
+                        <a:srgbClr val="FFFFFF"/>
                       </a:solidFill>
                       <a:prstDash val="solid"/>
                       <a:round/>
@@ -5085,7 +4853,7 @@
                     </a:lnT>
                     <a:lnB w="12700" cap="flat" cmpd="sng" algn="ctr">
                       <a:solidFill>
-                        <a:srgbClr val="0E1726"/>
+                        <a:srgbClr val="FFFFFF"/>
                       </a:solidFill>
                       <a:prstDash val="solid"/>
                       <a:round/>
@@ -5093,7 +4861,7 @@
                       <a:tailEnd type="none" w="med" len="med"/>
                     </a:lnB>
                     <a:solidFill>
-                      <a:srgbClr val="18243A"/>
+                      <a:srgbClr val="F1F5F9"/>
                     </a:solidFill>
                   </a:tcPr>
                 </a:tc>
@@ -5110,7 +4878,7 @@
                       <a:r>
                         <a:rPr lang="en-US" sz="1200" dirty="0">
                           <a:solidFill>
-                            <a:srgbClr val="E6EDF3"/>
+                            <a:srgbClr val="1F2937"/>
                           </a:solidFill>
                         </a:rPr>
                         <a:t>LLM07 System Prompt Leakage</a:t>
@@ -5121,7 +4889,7 @@
                   <a:tcPr marL="76200" marR="76200" marT="38100" marB="38100" anchor="ctr">
                     <a:lnL w="12700" cap="flat" cmpd="sng" algn="ctr">
                       <a:solidFill>
-                        <a:srgbClr val="0E1726"/>
+                        <a:srgbClr val="FFFFFF"/>
                       </a:solidFill>
                       <a:prstDash val="solid"/>
                       <a:round/>
@@ -5130,7 +4898,7 @@
                     </a:lnL>
                     <a:lnR w="12700" cap="flat" cmpd="sng" algn="ctr">
                       <a:solidFill>
-                        <a:srgbClr val="0E1726"/>
+                        <a:srgbClr val="FFFFFF"/>
                       </a:solidFill>
                       <a:prstDash val="solid"/>
                       <a:round/>
@@ -5139,7 +4907,7 @@
                     </a:lnR>
                     <a:lnT w="12700" cap="flat" cmpd="sng" algn="ctr">
                       <a:solidFill>
-                        <a:srgbClr val="0E1726"/>
+                        <a:srgbClr val="FFFFFF"/>
                       </a:solidFill>
                       <a:prstDash val="solid"/>
                       <a:round/>
@@ -5148,7 +4916,7 @@
                     </a:lnT>
                     <a:lnB w="12700" cap="flat" cmpd="sng" algn="ctr">
                       <a:solidFill>
-                        <a:srgbClr val="0E1726"/>
+                        <a:srgbClr val="FFFFFF"/>
                       </a:solidFill>
                       <a:prstDash val="solid"/>
                       <a:round/>
@@ -5156,7 +4924,7 @@
                       <a:tailEnd type="none" w="med" len="med"/>
                     </a:lnB>
                     <a:solidFill>
-                      <a:srgbClr val="1E2B45"/>
+                      <a:srgbClr val="E8EDF3"/>
                     </a:solidFill>
                   </a:tcPr>
                 </a:tc>
@@ -5171,7 +4939,7 @@
                       <a:r>
                         <a:rPr lang="en-US" sz="1200" dirty="0">
                           <a:solidFill>
-                            <a:srgbClr val="E6EDF3"/>
+                            <a:srgbClr val="1F2937"/>
                           </a:solidFill>
                         </a:rPr>
                         <a:t>LLM08 Vector/Embedding</a:t>
@@ -5182,7 +4950,7 @@
                   <a:tcPr marL="76200" marR="76200" marT="38100" marB="38100" anchor="ctr">
                     <a:lnL w="12700" cap="flat" cmpd="sng" algn="ctr">
                       <a:solidFill>
-                        <a:srgbClr val="0E1726"/>
+                        <a:srgbClr val="FFFFFF"/>
                       </a:solidFill>
                       <a:prstDash val="solid"/>
                       <a:round/>
@@ -5191,7 +4959,7 @@
                     </a:lnL>
                     <a:lnR w="12700" cap="flat" cmpd="sng" algn="ctr">
                       <a:solidFill>
-                        <a:srgbClr val="0E1726"/>
+                        <a:srgbClr val="FFFFFF"/>
                       </a:solidFill>
                       <a:prstDash val="solid"/>
                       <a:round/>
@@ -5200,7 +4968,7 @@
                     </a:lnR>
                     <a:lnT w="12700" cap="flat" cmpd="sng" algn="ctr">
                       <a:solidFill>
-                        <a:srgbClr val="0E1726"/>
+                        <a:srgbClr val="FFFFFF"/>
                       </a:solidFill>
                       <a:prstDash val="solid"/>
                       <a:round/>
@@ -5209,7 +4977,7 @@
                     </a:lnT>
                     <a:lnB w="12700" cap="flat" cmpd="sng" algn="ctr">
                       <a:solidFill>
-                        <a:srgbClr val="0E1726"/>
+                        <a:srgbClr val="FFFFFF"/>
                       </a:solidFill>
                       <a:prstDash val="solid"/>
                       <a:round/>
@@ -5217,7 +4985,7 @@
                       <a:tailEnd type="none" w="med" len="med"/>
                     </a:lnB>
                     <a:solidFill>
-                      <a:srgbClr val="1E2B45"/>
+                      <a:srgbClr val="E8EDF3"/>
                     </a:solidFill>
                   </a:tcPr>
                 </a:tc>
@@ -5232,7 +5000,7 @@
                       <a:r>
                         <a:rPr lang="en-US" sz="1200" dirty="0">
                           <a:solidFill>
-                            <a:srgbClr val="E6EDF3"/>
+                            <a:srgbClr val="1F2937"/>
                           </a:solidFill>
                         </a:rPr>
                         <a:t>LLM09 Misinformation</a:t>
@@ -5243,7 +5011,7 @@
                   <a:tcPr marL="76200" marR="76200" marT="38100" marB="38100" anchor="ctr">
                     <a:lnL w="12700" cap="flat" cmpd="sng" algn="ctr">
                       <a:solidFill>
-                        <a:srgbClr val="0E1726"/>
+                        <a:srgbClr val="FFFFFF"/>
                       </a:solidFill>
                       <a:prstDash val="solid"/>
                       <a:round/>
@@ -5252,7 +5020,7 @@
                     </a:lnL>
                     <a:lnR w="12700" cap="flat" cmpd="sng" algn="ctr">
                       <a:solidFill>
-                        <a:srgbClr val="0E1726"/>
+                        <a:srgbClr val="FFFFFF"/>
                       </a:solidFill>
                       <a:prstDash val="solid"/>
                       <a:round/>
@@ -5261,7 +5029,7 @@
                     </a:lnR>
                     <a:lnT w="12700" cap="flat" cmpd="sng" algn="ctr">
                       <a:solidFill>
-                        <a:srgbClr val="0E1726"/>
+                        <a:srgbClr val="FFFFFF"/>
                       </a:solidFill>
                       <a:prstDash val="solid"/>
                       <a:round/>
@@ -5270,7 +5038,7 @@
                     </a:lnT>
                     <a:lnB w="12700" cap="flat" cmpd="sng" algn="ctr">
                       <a:solidFill>
-                        <a:srgbClr val="0E1726"/>
+                        <a:srgbClr val="FFFFFF"/>
                       </a:solidFill>
                       <a:prstDash val="solid"/>
                       <a:round/>
@@ -5278,7 +5046,7 @@
                       <a:tailEnd type="none" w="med" len="med"/>
                     </a:lnB>
                     <a:solidFill>
-                      <a:srgbClr val="1E2B45"/>
+                      <a:srgbClr val="E8EDF3"/>
                     </a:solidFill>
                   </a:tcPr>
                 </a:tc>
@@ -5295,7 +5063,7 @@
                       <a:r>
                         <a:rPr lang="en-US" sz="1200" dirty="0">
                           <a:solidFill>
-                            <a:srgbClr val="E6EDF3"/>
+                            <a:srgbClr val="1F2937"/>
                           </a:solidFill>
                         </a:rPr>
                         <a:t>LLM10 Unbounded Consumption</a:t>
@@ -5306,7 +5074,7 @@
                   <a:tcPr marL="76200" marR="76200" marT="38100" marB="38100" anchor="ctr">
                     <a:lnL w="12700" cap="flat" cmpd="sng" algn="ctr">
                       <a:solidFill>
-                        <a:srgbClr val="0E1726"/>
+                        <a:srgbClr val="FFFFFF"/>
                       </a:solidFill>
                       <a:prstDash val="solid"/>
                       <a:round/>
@@ -5315,7 +5083,7 @@
                     </a:lnL>
                     <a:lnR w="12700" cap="flat" cmpd="sng" algn="ctr">
                       <a:solidFill>
-                        <a:srgbClr val="0E1726"/>
+                        <a:srgbClr val="FFFFFF"/>
                       </a:solidFill>
                       <a:prstDash val="solid"/>
                       <a:round/>
@@ -5324,7 +5092,7 @@
                     </a:lnR>
                     <a:lnT w="12700" cap="flat" cmpd="sng" algn="ctr">
                       <a:solidFill>
-                        <a:srgbClr val="0E1726"/>
+                        <a:srgbClr val="FFFFFF"/>
                       </a:solidFill>
                       <a:prstDash val="solid"/>
                       <a:round/>
@@ -5333,7 +5101,7 @@
                     </a:lnT>
                     <a:lnB w="12700" cap="flat" cmpd="sng" algn="ctr">
                       <a:solidFill>
-                        <a:srgbClr val="0E1726"/>
+                        <a:srgbClr val="FFFFFF"/>
                       </a:solidFill>
                       <a:prstDash val="solid"/>
                       <a:round/>
@@ -5341,7 +5109,7 @@
                       <a:tailEnd type="none" w="med" len="med"/>
                     </a:lnB>
                     <a:solidFill>
-                      <a:srgbClr val="18243A"/>
+                      <a:srgbClr val="F1F5F9"/>
                     </a:solidFill>
                   </a:tcPr>
                 </a:tc>
@@ -5359,7 +5127,7 @@
                   <a:tcPr marL="76200" marR="76200" marT="38100" marB="38100" anchor="ctr">
                     <a:lnL w="12700" cap="flat" cmpd="sng" algn="ctr">
                       <a:solidFill>
-                        <a:srgbClr val="0E1726"/>
+                        <a:srgbClr val="FFFFFF"/>
                       </a:solidFill>
                       <a:prstDash val="solid"/>
                       <a:round/>
@@ -5368,7 +5136,7 @@
                     </a:lnL>
                     <a:lnR w="12700" cap="flat" cmpd="sng" algn="ctr">
                       <a:solidFill>
-                        <a:srgbClr val="0E1726"/>
+                        <a:srgbClr val="FFFFFF"/>
                       </a:solidFill>
                       <a:prstDash val="solid"/>
                       <a:round/>
@@ -5377,7 +5145,7 @@
                     </a:lnR>
                     <a:lnT w="12700" cap="flat" cmpd="sng" algn="ctr">
                       <a:solidFill>
-                        <a:srgbClr val="0E1726"/>
+                        <a:srgbClr val="FFFFFF"/>
                       </a:solidFill>
                       <a:prstDash val="solid"/>
                       <a:round/>
@@ -5386,7 +5154,7 @@
                     </a:lnT>
                     <a:lnB w="12700" cap="flat" cmpd="sng" algn="ctr">
                       <a:solidFill>
-                        <a:srgbClr val="0E1726"/>
+                        <a:srgbClr val="FFFFFF"/>
                       </a:solidFill>
                       <a:prstDash val="solid"/>
                       <a:round/>
@@ -5394,7 +5162,7 @@
                       <a:tailEnd type="none" w="med" len="med"/>
                     </a:lnB>
                     <a:solidFill>
-                      <a:srgbClr val="18243A"/>
+                      <a:srgbClr val="F1F5F9"/>
                     </a:solidFill>
                   </a:tcPr>
                 </a:tc>
@@ -5412,7 +5180,7 @@
                   <a:tcPr marL="76200" marR="76200" marT="38100" marB="38100" anchor="ctr">
                     <a:lnL w="12700" cap="flat" cmpd="sng" algn="ctr">
                       <a:solidFill>
-                        <a:srgbClr val="0E1726"/>
+                        <a:srgbClr val="FFFFFF"/>
                       </a:solidFill>
                       <a:prstDash val="solid"/>
                       <a:round/>
@@ -5421,7 +5189,7 @@
                     </a:lnL>
                     <a:lnR w="12700" cap="flat" cmpd="sng" algn="ctr">
                       <a:solidFill>
-                        <a:srgbClr val="0E1726"/>
+                        <a:srgbClr val="FFFFFF"/>
                       </a:solidFill>
                       <a:prstDash val="solid"/>
                       <a:round/>
@@ -5430,7 +5198,7 @@
                     </a:lnR>
                     <a:lnT w="12700" cap="flat" cmpd="sng" algn="ctr">
                       <a:solidFill>
-                        <a:srgbClr val="0E1726"/>
+                        <a:srgbClr val="FFFFFF"/>
                       </a:solidFill>
                       <a:prstDash val="solid"/>
                       <a:round/>
@@ -5439,7 +5207,7 @@
                     </a:lnT>
                     <a:lnB w="12700" cap="flat" cmpd="sng" algn="ctr">
                       <a:solidFill>
-                        <a:srgbClr val="0E1726"/>
+                        <a:srgbClr val="FFFFFF"/>
                       </a:solidFill>
                       <a:prstDash val="solid"/>
                       <a:round/>
@@ -5447,7 +5215,7 @@
                       <a:tailEnd type="none" w="med" len="med"/>
                     </a:lnB>
                     <a:solidFill>
-                      <a:srgbClr val="18243A"/>
+                      <a:srgbClr val="F1F5F9"/>
                     </a:solidFill>
                   </a:tcPr>
                 </a:tc>
@@ -5473,7 +5241,7 @@
             </a:avLst>
           </a:prstGeom>
           <a:solidFill>
-            <a:srgbClr val="1E2B45"/>
+            <a:srgbClr val="E8EDF3"/>
           </a:solidFill>
           <a:ln/>
         </p:spPr>
@@ -5511,7 +5279,7 @@
                 <a:ea typeface="Calibri" pitchFamily="34" charset="-122"/>
                 <a:cs typeface="Calibri" pitchFamily="34" charset="-120"/>
               </a:rPr>
-              <a:t>New in 2025: LLM07 System Prompt Leakage · LLM08 promoted (RAG everywhere) · LLM10 replaces "DoS" with runaway *cost*.</a:t>
+              <a:t>New in 2025: LLM07 System Prompt Leakage · LLM08 promoted (RAG everywhere) · LLM10 replaces "DoS" with runaway cost.</a:t>
             </a:r>
             <a:endParaRPr lang="en-US" sz="1400" dirty="0"/>
           </a:p>
@@ -5544,7 +5312,7 @@
             <a:r>
               <a:rPr lang="en-US" sz="900" dirty="0">
                 <a:solidFill>
-                  <a:srgbClr val="94A3B8"/>
+                  <a:srgbClr val="64748B"/>
                 </a:solidFill>
                 <a:latin typeface="Calibri" pitchFamily="34" charset="0"/>
                 <a:ea typeface="Calibri" pitchFamily="34" charset="-122"/>
@@ -5556,38 +5324,9 @@
           </a:p>
         </p:txBody>
       </p:sp>
-      <p:sp>
-        <p:nvSpPr>
-          <p:cNvPr id="9" name="Shape 5"/>
-          <p:cNvSpPr/>
-          <p:nvPr/>
-        </p:nvSpPr>
-        <p:spPr>
-          <a:xfrm>
-            <a:off x="7772400" y="4590288"/>
-            <a:ext cx="969264" cy="475488"/>
-          </a:xfrm>
-          <a:prstGeom prst="roundRect">
-            <a:avLst>
-              <a:gd name="adj" fmla="val 11538"/>
-            </a:avLst>
-          </a:prstGeom>
-          <a:solidFill>
-            <a:srgbClr val="FFFFFF"/>
-          </a:solidFill>
-          <a:ln/>
-          <a:effectLst>
-            <a:outerShdw sx="100000" sy="100000" kx="0" ky="0" algn="bl" rotWithShape="0" blurRad="101600" dist="38100" dir="5400000">
-              <a:srgbClr val="000000">
-                <a:alpha val="35000"/>
-              </a:srgbClr>
-            </a:outerShdw>
-          </a:effectLst>
-        </p:spPr>
-      </p:sp>
       <p:pic>
         <p:nvPicPr>
-          <p:cNvPr id="10" name="Image 1" descr="/Users/pop7/Library/CloudStorage/OneDrive-MonsterConnectCo.,Ltd/Lecture/KOSEN69 - software-security/slides/pptx/assets/logo-small.png">    </p:cNvPr>
+          <p:cNvPr id="9" name="Image 1" descr="/Users/pop7/Library/CloudStorage/OneDrive-MonsterConnectCo.,Ltd/Lecture/KOSEN69 - software-security/slides/pptx/assets/logo-small.png">    </p:cNvPr>
           <p:cNvPicPr>
             <a:picLocks noChangeAspect="1"/>
           </p:cNvPicPr>
@@ -5601,7 +5340,7 @@
         </p:blipFill>
         <p:spPr>
           <a:xfrm>
-            <a:off x="7872984" y="4681728"/>
+            <a:off x="7882128" y="4700016"/>
             <a:ext cx="768096" cy="356616"/>
           </a:xfrm>
           <a:prstGeom prst="rect">
@@ -5623,7 +5362,7 @@
     <p:bg>
       <p:bgPr>
         <a:solidFill>
-          <a:srgbClr val="0E1726"/>
+          <a:srgbClr val="FFFFFF"/>
         </a:solidFill>
       </p:bgPr>
     </p:bg>
@@ -5660,9 +5399,9 @@
           </a:solidFill>
           <a:ln/>
           <a:effectLst>
-            <a:outerShdw sx="100000" sy="100000" kx="0" ky="0" algn="bl" rotWithShape="0" blurRad="101600" dist="38100" dir="5400000">
+            <a:outerShdw sx="100000" sy="100000" kx="0" ky="0" algn="bl" rotWithShape="0" blurRad="76200" dist="25400" dir="5400000">
               <a:srgbClr val="000000">
-                <a:alpha val="35000"/>
+                <a:alpha val="12000"/>
               </a:srgbClr>
             </a:outerShdw>
           </a:effectLst>
@@ -5719,7 +5458,7 @@
             <a:r>
               <a:rPr lang="en-US" sz="2600" b="1" dirty="0">
                 <a:solidFill>
-                  <a:srgbClr val="E6EDF3"/>
+                  <a:srgbClr val="1F2937"/>
                 </a:solidFill>
                 <a:latin typeface="Arial" pitchFamily="34" charset="0"/>
                 <a:ea typeface="Arial" pitchFamily="34" charset="-122"/>
@@ -5748,7 +5487,7 @@
             </a:avLst>
           </a:prstGeom>
           <a:solidFill>
-            <a:srgbClr val="1E2B45"/>
+            <a:srgbClr val="E8EDF3"/>
           </a:solidFill>
           <a:ln/>
         </p:spPr>
@@ -5809,13 +5548,13 @@
             </a:avLst>
           </a:prstGeom>
           <a:solidFill>
-            <a:srgbClr val="18243A"/>
+            <a:srgbClr val="F1F5F9"/>
           </a:solidFill>
           <a:ln/>
           <a:effectLst>
-            <a:outerShdw sx="100000" sy="100000" kx="0" ky="0" algn="bl" rotWithShape="0" blurRad="101600" dist="38100" dir="5400000">
+            <a:outerShdw sx="100000" sy="100000" kx="0" ky="0" algn="bl" rotWithShape="0" blurRad="76200" dist="25400" dir="5400000">
               <a:srgbClr val="000000">
-                <a:alpha val="35000"/>
+                <a:alpha val="12000"/>
               </a:srgbClr>
             </a:outerShdw>
           </a:effectLst>
@@ -5852,7 +5591,7 @@
             <a:r>
               <a:rPr lang="en-US" sz="1400" dirty="0">
                 <a:solidFill>
-                  <a:srgbClr val="E6EDF3"/>
+                  <a:srgbClr val="1F2937"/>
                 </a:solidFill>
                 <a:latin typeface="Calibri" pitchFamily="34" charset="0"/>
                 <a:ea typeface="Calibri" pitchFamily="34" charset="-122"/>
@@ -5873,7 +5612,7 @@
             <a:r>
               <a:rPr lang="en-US" sz="1400" dirty="0">
                 <a:solidFill>
-                  <a:srgbClr val="E6EDF3"/>
+                  <a:srgbClr val="1F2937"/>
                 </a:solidFill>
                 <a:latin typeface="Calibri" pitchFamily="34" charset="0"/>
                 <a:ea typeface="Calibri" pitchFamily="34" charset="-122"/>
@@ -5912,7 +5651,7 @@
             <a:r>
               <a:rPr lang="en-US" sz="900" dirty="0">
                 <a:solidFill>
-                  <a:srgbClr val="94A3B8"/>
+                  <a:srgbClr val="64748B"/>
                 </a:solidFill>
                 <a:latin typeface="Calibri" pitchFamily="34" charset="0"/>
                 <a:ea typeface="Calibri" pitchFamily="34" charset="-122"/>
@@ -5924,38 +5663,9 @@
           </a:p>
         </p:txBody>
       </p:sp>
-      <p:sp>
-        <p:nvSpPr>
-          <p:cNvPr id="10" name="Shape 7"/>
-          <p:cNvSpPr/>
-          <p:nvPr/>
-        </p:nvSpPr>
-        <p:spPr>
-          <a:xfrm>
-            <a:off x="7772400" y="4590288"/>
-            <a:ext cx="969264" cy="475488"/>
-          </a:xfrm>
-          <a:prstGeom prst="roundRect">
-            <a:avLst>
-              <a:gd name="adj" fmla="val 11538"/>
-            </a:avLst>
-          </a:prstGeom>
-          <a:solidFill>
-            <a:srgbClr val="FFFFFF"/>
-          </a:solidFill>
-          <a:ln/>
-          <a:effectLst>
-            <a:outerShdw sx="100000" sy="100000" kx="0" ky="0" algn="bl" rotWithShape="0" blurRad="101600" dist="38100" dir="5400000">
-              <a:srgbClr val="000000">
-                <a:alpha val="35000"/>
-              </a:srgbClr>
-            </a:outerShdw>
-          </a:effectLst>
-        </p:spPr>
-      </p:sp>
       <p:pic>
         <p:nvPicPr>
-          <p:cNvPr id="11" name="Image 1" descr="/Users/pop7/Library/CloudStorage/OneDrive-MonsterConnectCo.,Ltd/Lecture/KOSEN69 - software-security/slides/pptx/assets/logo-small.png">    </p:cNvPr>
+          <p:cNvPr id="10" name="Image 1" descr="/Users/pop7/Library/CloudStorage/OneDrive-MonsterConnectCo.,Ltd/Lecture/KOSEN69 - software-security/slides/pptx/assets/logo-small.png">    </p:cNvPr>
           <p:cNvPicPr>
             <a:picLocks noChangeAspect="1"/>
           </p:cNvPicPr>
@@ -5969,7 +5679,7 @@
         </p:blipFill>
         <p:spPr>
           <a:xfrm>
-            <a:off x="7872984" y="4681728"/>
+            <a:off x="7882128" y="4700016"/>
             <a:ext cx="768096" cy="356616"/>
           </a:xfrm>
           <a:prstGeom prst="rect">
@@ -5991,7 +5701,7 @@
     <p:bg>
       <p:bgPr>
         <a:solidFill>
-          <a:srgbClr val="0E1726"/>
+          <a:srgbClr val="FFFFFF"/>
         </a:solidFill>
       </p:bgPr>
     </p:bg>
@@ -6028,9 +5738,9 @@
           </a:solidFill>
           <a:ln/>
           <a:effectLst>
-            <a:outerShdw sx="100000" sy="100000" kx="0" ky="0" algn="bl" rotWithShape="0" blurRad="101600" dist="38100" dir="5400000">
+            <a:outerShdw sx="100000" sy="100000" kx="0" ky="0" algn="bl" rotWithShape="0" blurRad="76200" dist="25400" dir="5400000">
               <a:srgbClr val="000000">
-                <a:alpha val="35000"/>
+                <a:alpha val="12000"/>
               </a:srgbClr>
             </a:outerShdw>
           </a:effectLst>
@@ -6087,7 +5797,7 @@
             <a:r>
               <a:rPr lang="en-US" sz="2600" b="1" dirty="0">
                 <a:solidFill>
-                  <a:srgbClr val="E6EDF3"/>
+                  <a:srgbClr val="1F2937"/>
                 </a:solidFill>
                 <a:latin typeface="Arial" pitchFamily="34" charset="0"/>
                 <a:ea typeface="Arial" pitchFamily="34" charset="-122"/>
@@ -6116,13 +5826,13 @@
             </a:avLst>
           </a:prstGeom>
           <a:solidFill>
-            <a:srgbClr val="18243A"/>
+            <a:srgbClr val="F1F5F9"/>
           </a:solidFill>
           <a:ln/>
           <a:effectLst>
-            <a:outerShdw sx="100000" sy="100000" kx="0" ky="0" algn="bl" rotWithShape="0" blurRad="101600" dist="38100" dir="5400000">
+            <a:outerShdw sx="100000" sy="100000" kx="0" ky="0" algn="bl" rotWithShape="0" blurRad="76200" dist="25400" dir="5400000">
               <a:srgbClr val="000000">
-                <a:alpha val="35000"/>
+                <a:alpha val="12000"/>
               </a:srgbClr>
             </a:outerShdw>
           </a:effectLst>
@@ -6159,7 +5869,7 @@
             <a:r>
               <a:rPr lang="en-US" sz="1400" dirty="0">
                 <a:solidFill>
-                  <a:srgbClr val="E6EDF3"/>
+                  <a:srgbClr val="1F2937"/>
                 </a:solidFill>
                 <a:latin typeface="Calibri" pitchFamily="34" charset="0"/>
                 <a:ea typeface="Calibri" pitchFamily="34" charset="-122"/>
@@ -6180,7 +5890,7 @@
             <a:r>
               <a:rPr lang="en-US" sz="1400" dirty="0">
                 <a:solidFill>
-                  <a:srgbClr val="E6EDF3"/>
+                  <a:srgbClr val="1F2937"/>
                 </a:solidFill>
                 <a:latin typeface="Calibri" pitchFamily="34" charset="0"/>
                 <a:ea typeface="Calibri" pitchFamily="34" charset="-122"/>
@@ -6201,7 +5911,7 @@
             <a:r>
               <a:rPr lang="en-US" sz="1400" dirty="0">
                 <a:solidFill>
-                  <a:srgbClr val="E6EDF3"/>
+                  <a:srgbClr val="1F2937"/>
                 </a:solidFill>
                 <a:latin typeface="Calibri" pitchFamily="34" charset="0"/>
                 <a:ea typeface="Calibri" pitchFamily="34" charset="-122"/>
@@ -6240,7 +5950,7 @@
             <a:r>
               <a:rPr lang="en-US" sz="900" dirty="0">
                 <a:solidFill>
-                  <a:srgbClr val="94A3B8"/>
+                  <a:srgbClr val="64748B"/>
                 </a:solidFill>
                 <a:latin typeface="Calibri" pitchFamily="34" charset="0"/>
                 <a:ea typeface="Calibri" pitchFamily="34" charset="-122"/>
@@ -6252,38 +5962,9 @@
           </a:p>
         </p:txBody>
       </p:sp>
-      <p:sp>
-        <p:nvSpPr>
-          <p:cNvPr id="8" name="Shape 5"/>
-          <p:cNvSpPr/>
-          <p:nvPr/>
-        </p:nvSpPr>
-        <p:spPr>
-          <a:xfrm>
-            <a:off x="7772400" y="4590288"/>
-            <a:ext cx="969264" cy="475488"/>
-          </a:xfrm>
-          <a:prstGeom prst="roundRect">
-            <a:avLst>
-              <a:gd name="adj" fmla="val 11538"/>
-            </a:avLst>
-          </a:prstGeom>
-          <a:solidFill>
-            <a:srgbClr val="FFFFFF"/>
-          </a:solidFill>
-          <a:ln/>
-          <a:effectLst>
-            <a:outerShdw sx="100000" sy="100000" kx="0" ky="0" algn="bl" rotWithShape="0" blurRad="101600" dist="38100" dir="5400000">
-              <a:srgbClr val="000000">
-                <a:alpha val="35000"/>
-              </a:srgbClr>
-            </a:outerShdw>
-          </a:effectLst>
-        </p:spPr>
-      </p:sp>
       <p:pic>
         <p:nvPicPr>
-          <p:cNvPr id="9" name="Image 1" descr="/Users/pop7/Library/CloudStorage/OneDrive-MonsterConnectCo.,Ltd/Lecture/KOSEN69 - software-security/slides/pptx/assets/logo-small.png">    </p:cNvPr>
+          <p:cNvPr id="8" name="Image 1" descr="/Users/pop7/Library/CloudStorage/OneDrive-MonsterConnectCo.,Ltd/Lecture/KOSEN69 - software-security/slides/pptx/assets/logo-small.png">    </p:cNvPr>
           <p:cNvPicPr>
             <a:picLocks noChangeAspect="1"/>
           </p:cNvPicPr>
@@ -6297,7 +5978,7 @@
         </p:blipFill>
         <p:spPr>
           <a:xfrm>
-            <a:off x="7872984" y="4681728"/>
+            <a:off x="7882128" y="4700016"/>
             <a:ext cx="768096" cy="356616"/>
           </a:xfrm>
           <a:prstGeom prst="rect">
@@ -6319,7 +6000,7 @@
     <p:bg>
       <p:bgPr>
         <a:solidFill>
-          <a:srgbClr val="0E1726"/>
+          <a:srgbClr val="FFFFFF"/>
         </a:solidFill>
       </p:bgPr>
     </p:bg>
@@ -6356,9 +6037,9 @@
           </a:solidFill>
           <a:ln/>
           <a:effectLst>
-            <a:outerShdw sx="100000" sy="100000" kx="0" ky="0" algn="bl" rotWithShape="0" blurRad="101600" dist="38100" dir="5400000">
+            <a:outerShdw sx="100000" sy="100000" kx="0" ky="0" algn="bl" rotWithShape="0" blurRad="76200" dist="25400" dir="5400000">
               <a:srgbClr val="000000">
-                <a:alpha val="35000"/>
+                <a:alpha val="12000"/>
               </a:srgbClr>
             </a:outerShdw>
           </a:effectLst>
@@ -6415,7 +6096,7 @@
             <a:r>
               <a:rPr lang="en-US" sz="2600" b="1" dirty="0">
                 <a:solidFill>
-                  <a:srgbClr val="E6EDF3"/>
+                  <a:srgbClr val="1F2937"/>
                 </a:solidFill>
                 <a:latin typeface="Arial" pitchFamily="34" charset="0"/>
                 <a:ea typeface="Arial" pitchFamily="34" charset="-122"/>
@@ -6444,13 +6125,13 @@
             </a:avLst>
           </a:prstGeom>
           <a:solidFill>
-            <a:srgbClr val="18243A"/>
+            <a:srgbClr val="F1F5F9"/>
           </a:solidFill>
           <a:ln/>
           <a:effectLst>
-            <a:outerShdw sx="100000" sy="100000" kx="0" ky="0" algn="bl" rotWithShape="0" blurRad="101600" dist="38100" dir="5400000">
+            <a:outerShdw sx="100000" sy="100000" kx="0" ky="0" algn="bl" rotWithShape="0" blurRad="76200" dist="25400" dir="5400000">
               <a:srgbClr val="000000">
-                <a:alpha val="35000"/>
+                <a:alpha val="12000"/>
               </a:srgbClr>
             </a:outerShdw>
           </a:effectLst>
@@ -6487,7 +6168,7 @@
             <a:r>
               <a:rPr lang="en-US" sz="1400" dirty="0">
                 <a:solidFill>
-                  <a:srgbClr val="E6EDF3"/>
+                  <a:srgbClr val="1F2937"/>
                 </a:solidFill>
                 <a:latin typeface="Calibri" pitchFamily="34" charset="0"/>
                 <a:ea typeface="Calibri" pitchFamily="34" charset="-122"/>
@@ -6508,13 +6189,13 @@
             <a:r>
               <a:rPr lang="en-US" sz="1400" dirty="0">
                 <a:solidFill>
-                  <a:srgbClr val="E6EDF3"/>
+                  <a:srgbClr val="1F2937"/>
                 </a:solidFill>
                 <a:latin typeface="Calibri" pitchFamily="34" charset="0"/>
                 <a:ea typeface="Calibri" pitchFamily="34" charset="-122"/>
                 <a:cs typeface="Calibri" pitchFamily="34" charset="-120"/>
               </a:rPr>
-              <a:t>EchoLeak (2025): *zero-click* indirect injection in M365 Copilot → data exfil (CVE-2025-32711)</a:t>
+              <a:t>EchoLeak (2025): zero-click indirect injection in M365 Copilot → data exfil (CVE-2025-32711)</a:t>
             </a:r>
             <a:endParaRPr lang="en-US" sz="1400" dirty="0"/>
           </a:p>
@@ -6529,7 +6210,7 @@
             <a:r>
               <a:rPr lang="en-US" sz="1400" dirty="0">
                 <a:solidFill>
-                  <a:srgbClr val="E6EDF3"/>
+                  <a:srgbClr val="1F2937"/>
                 </a:solidFill>
                 <a:latin typeface="Calibri" pitchFamily="34" charset="0"/>
                 <a:ea typeface="Calibri" pitchFamily="34" charset="-122"/>
@@ -6550,7 +6231,7 @@
             <a:r>
               <a:rPr lang="en-US" sz="1400" dirty="0">
                 <a:solidFill>
-                  <a:srgbClr val="E6EDF3"/>
+                  <a:srgbClr val="1F2937"/>
                 </a:solidFill>
                 <a:latin typeface="Calibri" pitchFamily="34" charset="0"/>
                 <a:ea typeface="Calibri" pitchFamily="34" charset="-122"/>
@@ -6579,7 +6260,7 @@
             </a:avLst>
           </a:prstGeom>
           <a:solidFill>
-            <a:srgbClr val="1E2B45"/>
+            <a:srgbClr val="E8EDF3"/>
           </a:solidFill>
           <a:ln/>
         </p:spPr>
@@ -6650,7 +6331,7 @@
             <a:r>
               <a:rPr lang="en-US" sz="900" dirty="0">
                 <a:solidFill>
-                  <a:srgbClr val="94A3B8"/>
+                  <a:srgbClr val="64748B"/>
                 </a:solidFill>
                 <a:latin typeface="Calibri" pitchFamily="34" charset="0"/>
                 <a:ea typeface="Calibri" pitchFamily="34" charset="-122"/>
@@ -6662,38 +6343,9 @@
           </a:p>
         </p:txBody>
       </p:sp>
-      <p:sp>
-        <p:nvSpPr>
-          <p:cNvPr id="10" name="Shape 7"/>
-          <p:cNvSpPr/>
-          <p:nvPr/>
-        </p:nvSpPr>
-        <p:spPr>
-          <a:xfrm>
-            <a:off x="7772400" y="4590288"/>
-            <a:ext cx="969264" cy="475488"/>
-          </a:xfrm>
-          <a:prstGeom prst="roundRect">
-            <a:avLst>
-              <a:gd name="adj" fmla="val 11538"/>
-            </a:avLst>
-          </a:prstGeom>
-          <a:solidFill>
-            <a:srgbClr val="FFFFFF"/>
-          </a:solidFill>
-          <a:ln/>
-          <a:effectLst>
-            <a:outerShdw sx="100000" sy="100000" kx="0" ky="0" algn="bl" rotWithShape="0" blurRad="101600" dist="38100" dir="5400000">
-              <a:srgbClr val="000000">
-                <a:alpha val="35000"/>
-              </a:srgbClr>
-            </a:outerShdw>
-          </a:effectLst>
-        </p:spPr>
-      </p:sp>
       <p:pic>
         <p:nvPicPr>
-          <p:cNvPr id="11" name="Image 1" descr="/Users/pop7/Library/CloudStorage/OneDrive-MonsterConnectCo.,Ltd/Lecture/KOSEN69 - software-security/slides/pptx/assets/logo-small.png">    </p:cNvPr>
+          <p:cNvPr id="10" name="Image 1" descr="/Users/pop7/Library/CloudStorage/OneDrive-MonsterConnectCo.,Ltd/Lecture/KOSEN69 - software-security/slides/pptx/assets/logo-small.png">    </p:cNvPr>
           <p:cNvPicPr>
             <a:picLocks noChangeAspect="1"/>
           </p:cNvPicPr>
@@ -6707,7 +6359,7 @@
         </p:blipFill>
         <p:spPr>
           <a:xfrm>
-            <a:off x="7872984" y="4681728"/>
+            <a:off x="7882128" y="4700016"/>
             <a:ext cx="768096" cy="356616"/>
           </a:xfrm>
           <a:prstGeom prst="rect">
@@ -6729,7 +6381,7 @@
     <p:bg>
       <p:bgPr>
         <a:solidFill>
-          <a:srgbClr val="0E1726"/>
+          <a:srgbClr val="FFFFFF"/>
         </a:solidFill>
       </p:bgPr>
     </p:bg>
@@ -6766,9 +6418,9 @@
           </a:solidFill>
           <a:ln/>
           <a:effectLst>
-            <a:outerShdw sx="100000" sy="100000" kx="0" ky="0" algn="bl" rotWithShape="0" blurRad="101600" dist="38100" dir="5400000">
+            <a:outerShdw sx="100000" sy="100000" kx="0" ky="0" algn="bl" rotWithShape="0" blurRad="76200" dist="25400" dir="5400000">
               <a:srgbClr val="000000">
-                <a:alpha val="35000"/>
+                <a:alpha val="12000"/>
               </a:srgbClr>
             </a:outerShdw>
           </a:effectLst>
@@ -6825,7 +6477,7 @@
             <a:r>
               <a:rPr lang="en-US" sz="2600" b="1" dirty="0">
                 <a:solidFill>
-                  <a:srgbClr val="E6EDF3"/>
+                  <a:srgbClr val="1F2937"/>
                 </a:solidFill>
                 <a:latin typeface="Arial" pitchFamily="34" charset="0"/>
                 <a:ea typeface="Arial" pitchFamily="34" charset="-122"/>
@@ -6854,13 +6506,13 @@
             </a:avLst>
           </a:prstGeom>
           <a:solidFill>
-            <a:srgbClr val="18243A"/>
+            <a:srgbClr val="F1F5F9"/>
           </a:solidFill>
           <a:ln/>
           <a:effectLst>
-            <a:outerShdw sx="100000" sy="100000" kx="0" ky="0" algn="bl" rotWithShape="0" blurRad="101600" dist="38100" dir="5400000">
+            <a:outerShdw sx="100000" sy="100000" kx="0" ky="0" algn="bl" rotWithShape="0" blurRad="76200" dist="25400" dir="5400000">
               <a:srgbClr val="000000">
-                <a:alpha val="35000"/>
+                <a:alpha val="12000"/>
               </a:srgbClr>
             </a:outerShdw>
           </a:effectLst>
@@ -6897,7 +6549,7 @@
             <a:r>
               <a:rPr lang="en-US" sz="1400" dirty="0">
                 <a:solidFill>
-                  <a:srgbClr val="E6EDF3"/>
+                  <a:srgbClr val="1F2937"/>
                 </a:solidFill>
                 <a:latin typeface="Calibri" pitchFamily="34" charset="0"/>
                 <a:ea typeface="Calibri" pitchFamily="34" charset="-122"/>
@@ -6918,7 +6570,7 @@
             <a:r>
               <a:rPr lang="en-US" sz="1400" dirty="0">
                 <a:solidFill>
-                  <a:srgbClr val="E6EDF3"/>
+                  <a:srgbClr val="1F2937"/>
                 </a:solidFill>
                 <a:latin typeface="Calibri" pitchFamily="34" charset="0"/>
                 <a:ea typeface="Calibri" pitchFamily="34" charset="-122"/>
@@ -6939,7 +6591,7 @@
             <a:r>
               <a:rPr lang="en-US" sz="1400" dirty="0">
                 <a:solidFill>
-                  <a:srgbClr val="E6EDF3"/>
+                  <a:srgbClr val="1F2937"/>
                 </a:solidFill>
                 <a:latin typeface="Calibri" pitchFamily="34" charset="0"/>
                 <a:ea typeface="Calibri" pitchFamily="34" charset="-122"/>
@@ -6960,7 +6612,7 @@
             <a:r>
               <a:rPr lang="en-US" sz="1400" dirty="0">
                 <a:solidFill>
-                  <a:srgbClr val="E6EDF3"/>
+                  <a:srgbClr val="1F2937"/>
                 </a:solidFill>
                 <a:latin typeface="Calibri" pitchFamily="34" charset="0"/>
                 <a:ea typeface="Calibri" pitchFamily="34" charset="-122"/>
@@ -6999,7 +6651,7 @@
             <a:r>
               <a:rPr lang="en-US" sz="900" dirty="0">
                 <a:solidFill>
-                  <a:srgbClr val="94A3B8"/>
+                  <a:srgbClr val="64748B"/>
                 </a:solidFill>
                 <a:latin typeface="Calibri" pitchFamily="34" charset="0"/>
                 <a:ea typeface="Calibri" pitchFamily="34" charset="-122"/>
@@ -7011,38 +6663,9 @@
           </a:p>
         </p:txBody>
       </p:sp>
-      <p:sp>
-        <p:nvSpPr>
-          <p:cNvPr id="8" name="Shape 5"/>
-          <p:cNvSpPr/>
-          <p:nvPr/>
-        </p:nvSpPr>
-        <p:spPr>
-          <a:xfrm>
-            <a:off x="7772400" y="4590288"/>
-            <a:ext cx="969264" cy="475488"/>
-          </a:xfrm>
-          <a:prstGeom prst="roundRect">
-            <a:avLst>
-              <a:gd name="adj" fmla="val 11538"/>
-            </a:avLst>
-          </a:prstGeom>
-          <a:solidFill>
-            <a:srgbClr val="FFFFFF"/>
-          </a:solidFill>
-          <a:ln/>
-          <a:effectLst>
-            <a:outerShdw sx="100000" sy="100000" kx="0" ky="0" algn="bl" rotWithShape="0" blurRad="101600" dist="38100" dir="5400000">
-              <a:srgbClr val="000000">
-                <a:alpha val="35000"/>
-              </a:srgbClr>
-            </a:outerShdw>
-          </a:effectLst>
-        </p:spPr>
-      </p:sp>
       <p:pic>
         <p:nvPicPr>
-          <p:cNvPr id="9" name="Image 1" descr="/Users/pop7/Library/CloudStorage/OneDrive-MonsterConnectCo.,Ltd/Lecture/KOSEN69 - software-security/slides/pptx/assets/logo-small.png">    </p:cNvPr>
+          <p:cNvPr id="8" name="Image 1" descr="/Users/pop7/Library/CloudStorage/OneDrive-MonsterConnectCo.,Ltd/Lecture/KOSEN69 - software-security/slides/pptx/assets/logo-small.png">    </p:cNvPr>
           <p:cNvPicPr>
             <a:picLocks noChangeAspect="1"/>
           </p:cNvPicPr>
@@ -7056,7 +6679,7 @@
         </p:blipFill>
         <p:spPr>
           <a:xfrm>
-            <a:off x="7872984" y="4681728"/>
+            <a:off x="7882128" y="4700016"/>
             <a:ext cx="768096" cy="356616"/>
           </a:xfrm>
           <a:prstGeom prst="rect">
@@ -7078,7 +6701,7 @@
     <p:bg>
       <p:bgPr>
         <a:solidFill>
-          <a:srgbClr val="0E1726"/>
+          <a:srgbClr val="FFFFFF"/>
         </a:solidFill>
       </p:bgPr>
     </p:bg>
@@ -7115,9 +6738,9 @@
           </a:solidFill>
           <a:ln/>
           <a:effectLst>
-            <a:outerShdw sx="100000" sy="100000" kx="0" ky="0" algn="bl" rotWithShape="0" blurRad="101600" dist="38100" dir="5400000">
+            <a:outerShdw sx="100000" sy="100000" kx="0" ky="0" algn="bl" rotWithShape="0" blurRad="76200" dist="25400" dir="5400000">
               <a:srgbClr val="000000">
-                <a:alpha val="35000"/>
+                <a:alpha val="12000"/>
               </a:srgbClr>
             </a:outerShdw>
           </a:effectLst>
@@ -7174,7 +6797,7 @@
             <a:r>
               <a:rPr lang="en-US" sz="2600" b="1" dirty="0">
                 <a:solidFill>
-                  <a:srgbClr val="E6EDF3"/>
+                  <a:srgbClr val="1F2937"/>
                 </a:solidFill>
                 <a:latin typeface="Arial" pitchFamily="34" charset="0"/>
                 <a:ea typeface="Arial" pitchFamily="34" charset="-122"/>
@@ -7203,13 +6826,13 @@
             </a:avLst>
           </a:prstGeom>
           <a:solidFill>
-            <a:srgbClr val="18243A"/>
+            <a:srgbClr val="F1F5F9"/>
           </a:solidFill>
           <a:ln/>
           <a:effectLst>
-            <a:outerShdw sx="100000" sy="100000" kx="0" ky="0" algn="bl" rotWithShape="0" blurRad="101600" dist="38100" dir="5400000">
+            <a:outerShdw sx="100000" sy="100000" kx="0" ky="0" algn="bl" rotWithShape="0" blurRad="76200" dist="25400" dir="5400000">
               <a:srgbClr val="000000">
-                <a:alpha val="35000"/>
+                <a:alpha val="12000"/>
               </a:srgbClr>
             </a:outerShdw>
           </a:effectLst>
@@ -7246,7 +6869,7 @@
             <a:r>
               <a:rPr lang="en-US" sz="1400" dirty="0">
                 <a:solidFill>
-                  <a:srgbClr val="E6EDF3"/>
+                  <a:srgbClr val="1F2937"/>
                 </a:solidFill>
                 <a:latin typeface="Calibri" pitchFamily="34" charset="0"/>
                 <a:ea typeface="Calibri" pitchFamily="34" charset="-122"/>
@@ -7267,13 +6890,13 @@
             <a:r>
               <a:rPr lang="en-US" sz="1400" dirty="0">
                 <a:solidFill>
-                  <a:srgbClr val="E6EDF3"/>
+                  <a:srgbClr val="1F2937"/>
                 </a:solidFill>
                 <a:latin typeface="Calibri" pitchFamily="34" charset="0"/>
                 <a:ea typeface="Calibri" pitchFamily="34" charset="-122"/>
                 <a:cs typeface="Calibri" pitchFamily="34" charset="-120"/>
               </a:rPr>
-              <a:t>Invariant Labs: a malicious trivia MCP server's *tool description* hijacked a trusted WhatsApp MCP → exfiltrated chats</a:t>
+              <a:t>Invariant Labs: a malicious trivia MCP server's tool description hijacked a trusted WhatsApp MCP → exfiltrated chats</a:t>
             </a:r>
             <a:endParaRPr lang="en-US" sz="1400" dirty="0"/>
           </a:p>
@@ -7288,7 +6911,7 @@
             <a:r>
               <a:rPr lang="en-US" sz="1400" dirty="0">
                 <a:solidFill>
-                  <a:srgbClr val="E6EDF3"/>
+                  <a:srgbClr val="1F2937"/>
                 </a:solidFill>
                 <a:latin typeface="Calibri" pitchFamily="34" charset="0"/>
                 <a:ea typeface="Calibri" pitchFamily="34" charset="-122"/>
@@ -7317,7 +6940,7 @@
             </a:avLst>
           </a:prstGeom>
           <a:solidFill>
-            <a:srgbClr val="1E2B45"/>
+            <a:srgbClr val="E8EDF3"/>
           </a:solidFill>
           <a:ln/>
         </p:spPr>
@@ -7388,7 +7011,7 @@
             <a:r>
               <a:rPr lang="en-US" sz="900" dirty="0">
                 <a:solidFill>
-                  <a:srgbClr val="94A3B8"/>
+                  <a:srgbClr val="64748B"/>
                 </a:solidFill>
                 <a:latin typeface="Calibri" pitchFamily="34" charset="0"/>
                 <a:ea typeface="Calibri" pitchFamily="34" charset="-122"/>
@@ -7400,38 +7023,9 @@
           </a:p>
         </p:txBody>
       </p:sp>
-      <p:sp>
-        <p:nvSpPr>
-          <p:cNvPr id="10" name="Shape 7"/>
-          <p:cNvSpPr/>
-          <p:nvPr/>
-        </p:nvSpPr>
-        <p:spPr>
-          <a:xfrm>
-            <a:off x="7772400" y="4590288"/>
-            <a:ext cx="969264" cy="475488"/>
-          </a:xfrm>
-          <a:prstGeom prst="roundRect">
-            <a:avLst>
-              <a:gd name="adj" fmla="val 11538"/>
-            </a:avLst>
-          </a:prstGeom>
-          <a:solidFill>
-            <a:srgbClr val="FFFFFF"/>
-          </a:solidFill>
-          <a:ln/>
-          <a:effectLst>
-            <a:outerShdw sx="100000" sy="100000" kx="0" ky="0" algn="bl" rotWithShape="0" blurRad="101600" dist="38100" dir="5400000">
-              <a:srgbClr val="000000">
-                <a:alpha val="35000"/>
-              </a:srgbClr>
-            </a:outerShdw>
-          </a:effectLst>
-        </p:spPr>
-      </p:sp>
       <p:pic>
         <p:nvPicPr>
-          <p:cNvPr id="11" name="Image 1" descr="/Users/pop7/Library/CloudStorage/OneDrive-MonsterConnectCo.,Ltd/Lecture/KOSEN69 - software-security/slides/pptx/assets/logo-small.png">    </p:cNvPr>
+          <p:cNvPr id="10" name="Image 1" descr="/Users/pop7/Library/CloudStorage/OneDrive-MonsterConnectCo.,Ltd/Lecture/KOSEN69 - software-security/slides/pptx/assets/logo-small.png">    </p:cNvPr>
           <p:cNvPicPr>
             <a:picLocks noChangeAspect="1"/>
           </p:cNvPicPr>
@@ -7445,7 +7039,7 @@
         </p:blipFill>
         <p:spPr>
           <a:xfrm>
-            <a:off x="7872984" y="4681728"/>
+            <a:off x="7882128" y="4700016"/>
             <a:ext cx="768096" cy="356616"/>
           </a:xfrm>
           <a:prstGeom prst="rect">

--- a/slides/pptx/week14.pptx
+++ b/slides/pptx/week14.pptx
@@ -515,7 +515,7 @@
           <a:p>
             <a:r>
               <a:rPr lang="en-US" dirty="0"/>
-              <a:t/>
+              <a:t>Hook: it's 2026 — your students will all ship AI features. Show that a single sentence can make an AI assistant ignore its rules and leak a secret. No exploit code, just text. ~2 min.</a:t>
             </a:r>
             <a:endParaRPr lang="en-US" dirty="0"/>
           </a:p>
@@ -603,7 +603,7 @@
           <a:p>
             <a:r>
               <a:rPr lang="en-US" dirty="0"/>
-              <a:t/>
+              <a:t>The payoff — map each defense to a leg of the pattern: least-privilege tools cut PRIVILEGE; isolating RAG content cuts UNTRUSTED INPUT; egress limits + human approval cut the OUTBOUND CHANNEL. No single guardrail is enough; layer them. ~5 min.</a:t>
             </a:r>
             <a:endParaRPr lang="en-US" dirty="0"/>
           </a:p>
@@ -691,7 +691,7 @@
           <a:p>
             <a:r>
               <a:rPr lang="en-US" dirty="0"/>
-              <a:t/>
+              <a:t>Gandalf (Lakera) is genuinely fun and free — students compete to climb levels. Round 2 (build guardrails + least-privilege tools) is graded. Q6 of the quiz asks for the injection that captured the flag + why the guardrail failed. ~3 min.</a:t>
             </a:r>
             <a:endParaRPr lang="en-US" dirty="0"/>
           </a:p>
@@ -779,7 +779,7 @@
           <a:p>
             <a:r>
               <a:rPr lang="en-US" dirty="0"/>
-              <a:t/>
+              <a:t>The least-privilege tool design is the thinking deliverable. Especially fitting this week: the Audit-the-AI task critiques an AI's own (insecure) answer.</a:t>
             </a:r>
             <a:endParaRPr lang="en-US" dirty="0"/>
           </a:p>
@@ -867,7 +867,7 @@
           <a:p>
             <a:r>
               <a:rPr lang="en-US" dirty="0"/>
-              <a:t/>
+              <a:t>Recap. Cold-call: "the agent read a malicious email and wired money — which leg of privilege+input+channel would you cut, and how?" ~2 min.</a:t>
             </a:r>
             <a:endParaRPr lang="en-US" dirty="0"/>
           </a:p>
@@ -955,7 +955,7 @@
           <a:p>
             <a:r>
               <a:rPr lang="en-US" dirty="0"/>
-              <a:t/>
+              <a:t>Cliffhanger: "Next week we wire the whole course into one CI/CD pipeline — Red vs Blue: sneak a vuln past the gate, or block it."</a:t>
             </a:r>
             <a:endParaRPr lang="en-US" dirty="0"/>
           </a:p>
@@ -1043,7 +1043,7 @@
           <a:p>
             <a:r>
               <a:rPr lang="en-US" dirty="0"/>
-              <a:t/>
+              <a:t>Roadmap, 1 min. Big idea: prompt injection IS injection (W4) — untrusted data interpreted as instructions. Everything they learned applies. Lab = beat Gandalf, then add guardrails.</a:t>
             </a:r>
             <a:endParaRPr lang="en-US" dirty="0"/>
           </a:p>
@@ -1131,7 +1131,7 @@
           <a:p>
             <a:r>
               <a:rPr lang="en-US" dirty="0"/>
-              <a:t/>
+              <a:t>Justify the week: this is the most current, fastest-moving area in the course. Note the field changes monthly — what they learn is the THINKING, not a fixed list. OWASP LLM Top 10 + MITRE ATLAS are the references. ~3 min.</a:t>
             </a:r>
             <a:endParaRPr lang="en-US" dirty="0"/>
           </a:p>
@@ -1219,7 +1219,7 @@
           <a:p>
             <a:r>
               <a:rPr lang="en-US" dirty="0"/>
-              <a:t/>
+              <a:t>Don't read all 10 — highlight the 2025 changes. LLM07 (system-prompt leakage) is new because devs hid secrets in prompts. LLM10 reframed as runaway COST (an agent loop can run up a huge bill). ~4 min.</a:t>
             </a:r>
             <a:endParaRPr lang="en-US" dirty="0"/>
           </a:p>
@@ -1307,7 +1307,7 @@
           <a:p>
             <a:r>
               <a:rPr lang="en-US" dirty="0"/>
-              <a:t/>
+              <a:t>The core concept — say "this is W4 injection in a new interpreter (the LLM)." Direct = the Gandalf game. Indirect is the scary one: the payload rides in a document/email/web page the model reads, so the victim never typed it. ~6 min.</a:t>
             </a:r>
             <a:endParaRPr lang="en-US" dirty="0"/>
           </a:p>
@@ -1395,7 +1395,7 @@
           <a:p>
             <a:r>
               <a:rPr lang="en-US" dirty="0"/>
-              <a:t/>
+              <a:t>Crucial and overlooked: the LLM's OUTPUT is attacker-influenced data. If you drop it into innerHTML you get XSS (W5); into a query, SQLi (W4). The rule from W5 returns: encode for the context, validate before use. ~4 min.</a:t>
             </a:r>
             <a:endParaRPr lang="en-US" dirty="0"/>
           </a:p>
@@ -1483,7 +1483,7 @@
           <a:p>
             <a:r>
               <a:rPr lang="en-US" dirty="0"/>
-              <a:t/>
+              <a:t>EchoLeak is the headline: zero-click — the victim just receives an email Copilot later reads, and data exfiltrates. No link clicked. Résumé injection makes it relatable (white-on-white text gaming an AI screener). ~5 min.</a:t>
             </a:r>
             <a:endParaRPr lang="en-US" dirty="0"/>
           </a:p>
@@ -1571,7 +1571,7 @@
           <a:p>
             <a:r>
               <a:rPr lang="en-US" dirty="0"/>
-              <a:t/>
+              <a:t>The frontier — and where THEY will build. The moment an LLM can call tools, injection becomes real-world ACTIONS (send money, run code). The 43% MCP stat lands: the ecosystem is young and insecure. ~5 min.</a:t>
             </a:r>
             <a:endParaRPr lang="en-US" dirty="0"/>
           </a:p>
@@ -1659,7 +1659,7 @@
           <a:p>
             <a:r>
               <a:rPr lang="en-US" dirty="0"/>
-              <a:t/>
+              <a:t>Drive the pattern home — it's the unifying lesson: an exploit needs privilege + untrusted input + a way out. Break any one leg and the attack fails (that's what the defenses do). The tool-DESCRIPTION attack surprises everyone. ~5 min.</a:t>
             </a:r>
             <a:endParaRPr lang="en-US" dirty="0"/>
           </a:p>
@@ -3106,11 +3106,11 @@
         <p:spPr>
           <a:xfrm>
             <a:off x="457200" y="1325880"/>
-            <a:ext cx="8229600" cy="1207008"/>
+            <a:ext cx="8229600" cy="1517904"/>
           </a:xfrm>
           <a:prstGeom prst="roundRect">
             <a:avLst>
-              <a:gd name="adj" fmla="val 6061"/>
+              <a:gd name="adj" fmla="val 4819"/>
             </a:avLst>
           </a:prstGeom>
           <a:solidFill>
@@ -3135,7 +3135,7 @@
         <p:spPr>
           <a:xfrm>
             <a:off x="731520" y="1435608"/>
-            <a:ext cx="7680960" cy="987552"/>
+            <a:ext cx="7680960" cy="1298448"/>
           </a:xfrm>
           <a:prstGeom prst="rect">
             <a:avLst/>
@@ -3206,6 +3206,27 @@
                 <a:cs typeface="Calibri" pitchFamily="34" charset="-120"/>
               </a:rPr>
               <a:t>Least-privilege agent/MCP tool design</a:t>
+            </a:r>
+            <a:endParaRPr lang="en-US" sz="1400" dirty="0"/>
+          </a:p>
+          <a:p>
+            <a:pPr marL="342900" indent="-342900">
+              <a:spcAft>
+                <a:spcPts val="600"/>
+              </a:spcAft>
+              <a:buSzPct val="100000"/>
+              <a:buChar char="•"/>
+            </a:pPr>
+            <a:r>
+              <a:rPr lang="en-US" sz="1400" dirty="0">
+                <a:solidFill>
+                  <a:srgbClr val="1F2937"/>
+                </a:solidFill>
+                <a:latin typeface="Calibri" pitchFamily="34" charset="0"/>
+                <a:ea typeface="Calibri" pitchFamily="34" charset="-122"/>
+                <a:cs typeface="Calibri" pitchFamily="34" charset="-120"/>
+              </a:rPr>
+              <a:t>+ Audit the AI / EiPE / Prompt Problem (see worksheet)</a:t>
             </a:r>
             <a:endParaRPr lang="en-US" sz="1400" dirty="0"/>
           </a:p>

--- a/slides/pptx/week14.pptx
+++ b/slides/pptx/week14.pptx
@@ -3106,6 +3106,67 @@
         <p:spPr>
           <a:xfrm>
             <a:off x="457200" y="1325880"/>
+            <a:ext cx="8229600" cy="822960"/>
+          </a:xfrm>
+          <a:prstGeom prst="roundRect">
+            <a:avLst>
+              <a:gd name="adj" fmla="val 8889"/>
+            </a:avLst>
+          </a:prstGeom>
+          <a:solidFill>
+            <a:srgbClr val="E8EDF3"/>
+          </a:solidFill>
+          <a:ln/>
+        </p:spPr>
+      </p:sp>
+      <p:sp>
+        <p:nvSpPr>
+          <p:cNvPr id="6" name="Text 3"/>
+          <p:cNvSpPr/>
+          <p:nvPr/>
+        </p:nvSpPr>
+        <p:spPr>
+          <a:xfrm>
+            <a:off x="731520" y="1325880"/>
+            <a:ext cx="7680960" cy="822960"/>
+          </a:xfrm>
+          <a:prstGeom prst="rect">
+            <a:avLst/>
+          </a:prstGeom>
+          <a:noFill/>
+          <a:ln/>
+        </p:spPr>
+        <p:txBody>
+          <a:bodyPr wrap="square" lIns="0" tIns="0" rIns="0" bIns="0" rtlCol="0" anchor="ctr"/>
+          <a:lstStyle/>
+          <a:p>
+            <a:pPr indent="0" marL="0">
+              <a:buNone/>
+            </a:pPr>
+            <a:r>
+              <a:rPr lang="en-US" sz="1400" i="1" dirty="0">
+                <a:solidFill>
+                  <a:srgbClr val="E35205"/>
+                </a:solidFill>
+                <a:latin typeface="Calibri" pitchFamily="34" charset="0"/>
+                <a:ea typeface="Calibri" pitchFamily="34" charset="-122"/>
+                <a:cs typeface="Calibri" pitchFamily="34" charset="-120"/>
+              </a:rPr>
+              <a:t>📋 Worksheet 14 — labs/week14-ai-llm-security/worksheet.md (Part 3) · kickoff: docker compose up → :6000 (insecure) / :6001 (guarded)</a:t>
+            </a:r>
+            <a:endParaRPr lang="en-US" sz="1400" dirty="0"/>
+          </a:p>
+        </p:txBody>
+      </p:sp>
+      <p:sp>
+        <p:nvSpPr>
+          <p:cNvPr id="7" name="Shape 4"/>
+          <p:cNvSpPr/>
+          <p:nvPr/>
+        </p:nvSpPr>
+        <p:spPr>
+          <a:xfrm>
+            <a:off x="457200" y="2313432"/>
             <a:ext cx="8229600" cy="1517904"/>
           </a:xfrm>
           <a:prstGeom prst="roundRect">
@@ -3128,13 +3189,13 @@
       </p:sp>
       <p:sp>
         <p:nvSpPr>
-          <p:cNvPr id="6" name="Text 3"/>
-          <p:cNvSpPr/>
-          <p:nvPr/>
-        </p:nvSpPr>
-        <p:spPr>
-          <a:xfrm>
-            <a:off x="731520" y="1435608"/>
+          <p:cNvPr id="8" name="Text 5"/>
+          <p:cNvSpPr/>
+          <p:nvPr/>
+        </p:nvSpPr>
+        <p:spPr>
+          <a:xfrm>
+            <a:off x="731520" y="2423160"/>
             <a:ext cx="7680960" cy="1298448"/>
           </a:xfrm>
           <a:prstGeom prst="rect">
@@ -3234,7 +3295,7 @@
       </p:sp>
       <p:sp>
         <p:nvSpPr>
-          <p:cNvPr id="7" name="Text 4"/>
+          <p:cNvPr id="9" name="Text 6"/>
           <p:cNvSpPr/>
           <p:nvPr/>
         </p:nvSpPr>
@@ -3273,7 +3334,7 @@
       </p:sp>
       <p:pic>
         <p:nvPicPr>
-          <p:cNvPr id="8" name="Image 1" descr="/Users/pop7/Library/CloudStorage/OneDrive-MonsterConnectCo.,Ltd/Lecture/KOSEN69 - software-security/slides/pptx/assets/logo-small.png">    </p:cNvPr>
+          <p:cNvPr id="10" name="Image 1" descr="/Users/pop7/Library/CloudStorage/OneDrive-MonsterConnectCo.,Ltd/Lecture/KOSEN69 - software-security/slides/pptx/assets/logo-small.png">    </p:cNvPr>
           <p:cNvPicPr>
             <a:picLocks noChangeAspect="1"/>
           </p:cNvPicPr>
